--- a/slides/CSC336-Lecture-24-Response-Generation-with-Templates.pptx
+++ b/slides/CSC336-Lecture-24-Response-Generation-with-Templates.pptx
@@ -3281,79 +3281,44 @@
       </p:sp>
       <p:sp>
         <p:nvSpPr>
-          <p:cNvPr id="6" name="Text 4"/>
-          <p:cNvSpPr txBox="1"/>
-          <p:nvPr/>
-        </p:nvSpPr>
-        <p:spPr>
-          <a:xfrm>
-            <a:off x="640080" y="6446520"/>
-            <a:ext cx="8686800" cy="292608"/>
-          </a:xfrm>
-          <a:prstGeom prst="rect">
-            <a:avLst/>
-          </a:prstGeom>
-          <a:noFill/>
-          <a:ln/>
-        </p:spPr>
-        <p:txBody>
-          <a:bodyPr wrap="square" lIns="0" tIns="0" rIns="0" bIns="0" rtlCol="0" anchor="ctr"/>
-          <a:lstStyle/>
-          <a:p>
-            <a:pPr algn="l" indent="0" marL="0">
-              <a:buNone/>
-            </a:pPr>
-            <a:r>
-              <a:rPr lang="en-US" sz="900" dirty="0">
-                <a:solidFill>
-                  <a:srgbClr val="9AA3D8"/>
-                </a:solidFill>
-                <a:latin typeface="Calibri" pitchFamily="34" charset="0"/>
-                <a:ea typeface="Calibri" pitchFamily="34" charset="-122"/>
-                <a:cs typeface="Calibri" pitchFamily="34" charset="-120"/>
-              </a:rPr>
-              <a:t>Usman Akram  •  COMSATS University Islamabad</a:t>
-            </a:r>
-            <a:endParaRPr lang="en-US" sz="900" dirty="0"/>
-          </a:p>
-        </p:txBody>
-      </p:sp>
-      <p:sp>
-        <p:nvSpPr>
-          <p:cNvPr id="7" name="Text 5"/>
-          <p:cNvSpPr txBox="1"/>
-          <p:nvPr/>
-        </p:nvSpPr>
-        <p:spPr>
-          <a:xfrm>
-            <a:off x="11155680" y="6446520"/>
-            <a:ext cx="457200" cy="292608"/>
-          </a:xfrm>
-          <a:prstGeom prst="rect">
-            <a:avLst/>
-          </a:prstGeom>
-          <a:noFill/>
-          <a:ln/>
-        </p:spPr>
-        <p:txBody>
-          <a:bodyPr wrap="square" lIns="0" tIns="0" rIns="0" bIns="0" rtlCol="0" anchor="ctr"/>
-          <a:lstStyle/>
-          <a:p>
-            <a:pPr algn="r" indent="0" marL="0">
-              <a:buNone/>
-            </a:pPr>
-            <a:r>
-              <a:rPr lang="en-US" sz="900" dirty="0">
-                <a:solidFill>
-                  <a:srgbClr val="9AA3D8"/>
-                </a:solidFill>
-                <a:latin typeface="Calibri" pitchFamily="34" charset="0"/>
-                <a:ea typeface="Calibri" pitchFamily="34" charset="-122"/>
-                <a:cs typeface="Calibri" pitchFamily="34" charset="-120"/>
-              </a:rPr>
-              <a:t>1</a:t>
-            </a:r>
-            <a:endParaRPr lang="en-US" sz="900" dirty="0"/>
+          <p:cNvPr id="8" name="cuinotes-footer-mark"/>
+          <p:cNvSpPr txBox="1"/>
+          <p:nvPr/>
+        </p:nvSpPr>
+        <p:spPr>
+          <a:xfrm>
+            <a:off x="9951720" y="6455664"/>
+            <a:ext cx="2011680" cy="292608"/>
+          </a:xfrm>
+          <a:prstGeom prst="rect">
+            <a:avLst/>
+          </a:prstGeom>
+          <a:noFill/>
+        </p:spPr>
+        <p:txBody>
+          <a:bodyPr wrap="none" lIns="0" rIns="0" tIns="0" bIns="0">
+            <a:spAutoFit/>
+          </a:bodyPr>
+          <a:lstStyle/>
+          <a:p>
+            <a:pPr algn="r"/>
+            <a:r>
+              <a:rPr sz="1000">
+                <a:solidFill>
+                  <a:srgbClr val="8A939B"/>
+                </a:solidFill>
+                <a:hlinkClick r:id="rId3"/>
+              </a:rPr>
+              <a:t>cuinotes.com</a:t>
+            </a:r>
+            <a:r>
+              <a:rPr sz="1000">
+                <a:solidFill>
+                  <a:srgbClr val="8A939B"/>
+                </a:solidFill>
+              </a:rPr>
+              <a:t>  ·  1</a:t>
+            </a:r>
           </a:p>
         </p:txBody>
       </p:sp>
@@ -3488,6 +3453,10 @@
           </a:solidFill>
           <a:ln/>
         </p:spPr>
+        <p:txBody>
+          <a:bodyPr/>
+          <a:p/>
+        </p:txBody>
       </p:sp>
       <p:sp>
         <p:nvSpPr>
@@ -3673,79 +3642,44 @@
       </p:sp>
       <p:sp>
         <p:nvSpPr>
-          <p:cNvPr id="6" name="Text 4"/>
-          <p:cNvSpPr txBox="1"/>
-          <p:nvPr/>
-        </p:nvSpPr>
-        <p:spPr>
-          <a:xfrm>
-            <a:off x="640080" y="6446520"/>
-            <a:ext cx="8686800" cy="292608"/>
-          </a:xfrm>
-          <a:prstGeom prst="rect">
-            <a:avLst/>
-          </a:prstGeom>
-          <a:noFill/>
-          <a:ln/>
-        </p:spPr>
-        <p:txBody>
-          <a:bodyPr wrap="square" lIns="0" tIns="0" rIns="0" bIns="0" rtlCol="0" anchor="ctr"/>
-          <a:lstStyle/>
-          <a:p>
-            <a:pPr algn="l" indent="0" marL="0">
-              <a:buNone/>
-            </a:pPr>
-            <a:r>
-              <a:rPr lang="en-US" sz="900" dirty="0">
-                <a:solidFill>
-                  <a:srgbClr val="5D5D72"/>
-                </a:solidFill>
-                <a:latin typeface="Calibri" pitchFamily="34" charset="0"/>
-                <a:ea typeface="Calibri" pitchFamily="34" charset="-122"/>
-                <a:cs typeface="Calibri" pitchFamily="34" charset="-120"/>
-              </a:rPr>
-              <a:t>Usman Akram  •  COMSATS University Islamabad</a:t>
-            </a:r>
-            <a:endParaRPr lang="en-US" sz="900" dirty="0"/>
-          </a:p>
-        </p:txBody>
-      </p:sp>
-      <p:sp>
-        <p:nvSpPr>
-          <p:cNvPr id="7" name="Text 5"/>
-          <p:cNvSpPr txBox="1"/>
-          <p:nvPr/>
-        </p:nvSpPr>
-        <p:spPr>
-          <a:xfrm>
-            <a:off x="11155680" y="6446520"/>
-            <a:ext cx="457200" cy="292608"/>
-          </a:xfrm>
-          <a:prstGeom prst="rect">
-            <a:avLst/>
-          </a:prstGeom>
-          <a:noFill/>
-          <a:ln/>
-        </p:spPr>
-        <p:txBody>
-          <a:bodyPr wrap="square" lIns="0" tIns="0" rIns="0" bIns="0" rtlCol="0" anchor="ctr"/>
-          <a:lstStyle/>
-          <a:p>
-            <a:pPr algn="r" indent="0" marL="0">
-              <a:buNone/>
-            </a:pPr>
-            <a:r>
-              <a:rPr lang="en-US" sz="900" dirty="0">
-                <a:solidFill>
-                  <a:srgbClr val="5D5D72"/>
-                </a:solidFill>
-                <a:latin typeface="Calibri" pitchFamily="34" charset="0"/>
-                <a:ea typeface="Calibri" pitchFamily="34" charset="-122"/>
-                <a:cs typeface="Calibri" pitchFamily="34" charset="-120"/>
-              </a:rPr>
-              <a:t>10</a:t>
-            </a:r>
-            <a:endParaRPr lang="en-US" sz="900" dirty="0"/>
+          <p:cNvPr id="8" name="cuinotes-footer-mark"/>
+          <p:cNvSpPr txBox="1"/>
+          <p:nvPr/>
+        </p:nvSpPr>
+        <p:spPr>
+          <a:xfrm>
+            <a:off x="9951720" y="6455664"/>
+            <a:ext cx="2011680" cy="292608"/>
+          </a:xfrm>
+          <a:prstGeom prst="rect">
+            <a:avLst/>
+          </a:prstGeom>
+          <a:noFill/>
+        </p:spPr>
+        <p:txBody>
+          <a:bodyPr wrap="none" lIns="0" rIns="0" tIns="0" bIns="0">
+            <a:spAutoFit/>
+          </a:bodyPr>
+          <a:lstStyle/>
+          <a:p>
+            <a:pPr algn="r"/>
+            <a:r>
+              <a:rPr sz="1000">
+                <a:solidFill>
+                  <a:srgbClr val="8A939B"/>
+                </a:solidFill>
+                <a:hlinkClick r:id="rId3"/>
+              </a:rPr>
+              <a:t>cuinotes.com</a:t>
+            </a:r>
+            <a:r>
+              <a:rPr sz="1000">
+                <a:solidFill>
+                  <a:srgbClr val="8A939B"/>
+                </a:solidFill>
+              </a:rPr>
+              <a:t>  ·  10</a:t>
+            </a:r>
           </a:p>
         </p:txBody>
       </p:sp>
@@ -3880,6 +3814,10 @@
           </a:solidFill>
           <a:ln/>
         </p:spPr>
+        <p:txBody>
+          <a:bodyPr/>
+          <a:p/>
+        </p:txBody>
       </p:sp>
       <p:sp>
         <p:nvSpPr>
@@ -4225,79 +4163,44 @@
       </p:sp>
       <p:sp>
         <p:nvSpPr>
-          <p:cNvPr id="6" name="Text 4"/>
-          <p:cNvSpPr txBox="1"/>
-          <p:nvPr/>
-        </p:nvSpPr>
-        <p:spPr>
-          <a:xfrm>
-            <a:off x="640080" y="6446520"/>
-            <a:ext cx="8686800" cy="292608"/>
-          </a:xfrm>
-          <a:prstGeom prst="rect">
-            <a:avLst/>
-          </a:prstGeom>
-          <a:noFill/>
-          <a:ln/>
-        </p:spPr>
-        <p:txBody>
-          <a:bodyPr wrap="square" lIns="0" tIns="0" rIns="0" bIns="0" rtlCol="0" anchor="ctr"/>
-          <a:lstStyle/>
-          <a:p>
-            <a:pPr algn="l" indent="0" marL="0">
-              <a:buNone/>
-            </a:pPr>
-            <a:r>
-              <a:rPr lang="en-US" sz="900" dirty="0">
-                <a:solidFill>
-                  <a:srgbClr val="5D5D72"/>
-                </a:solidFill>
-                <a:latin typeface="Calibri" pitchFamily="34" charset="0"/>
-                <a:ea typeface="Calibri" pitchFamily="34" charset="-122"/>
-                <a:cs typeface="Calibri" pitchFamily="34" charset="-120"/>
-              </a:rPr>
-              <a:t>Usman Akram  •  COMSATS University Islamabad</a:t>
-            </a:r>
-            <a:endParaRPr lang="en-US" sz="900" dirty="0"/>
-          </a:p>
-        </p:txBody>
-      </p:sp>
-      <p:sp>
-        <p:nvSpPr>
-          <p:cNvPr id="7" name="Text 5"/>
-          <p:cNvSpPr txBox="1"/>
-          <p:nvPr/>
-        </p:nvSpPr>
-        <p:spPr>
-          <a:xfrm>
-            <a:off x="11155680" y="6446520"/>
-            <a:ext cx="457200" cy="292608"/>
-          </a:xfrm>
-          <a:prstGeom prst="rect">
-            <a:avLst/>
-          </a:prstGeom>
-          <a:noFill/>
-          <a:ln/>
-        </p:spPr>
-        <p:txBody>
-          <a:bodyPr wrap="square" lIns="0" tIns="0" rIns="0" bIns="0" rtlCol="0" anchor="ctr"/>
-          <a:lstStyle/>
-          <a:p>
-            <a:pPr algn="r" indent="0" marL="0">
-              <a:buNone/>
-            </a:pPr>
-            <a:r>
-              <a:rPr lang="en-US" sz="900" dirty="0">
-                <a:solidFill>
-                  <a:srgbClr val="5D5D72"/>
-                </a:solidFill>
-                <a:latin typeface="Calibri" pitchFamily="34" charset="0"/>
-                <a:ea typeface="Calibri" pitchFamily="34" charset="-122"/>
-                <a:cs typeface="Calibri" pitchFamily="34" charset="-120"/>
-              </a:rPr>
-              <a:t>11</a:t>
-            </a:r>
-            <a:endParaRPr lang="en-US" sz="900" dirty="0"/>
+          <p:cNvPr id="8" name="cuinotes-footer-mark"/>
+          <p:cNvSpPr txBox="1"/>
+          <p:nvPr/>
+        </p:nvSpPr>
+        <p:spPr>
+          <a:xfrm>
+            <a:off x="9951720" y="6455664"/>
+            <a:ext cx="2011680" cy="292608"/>
+          </a:xfrm>
+          <a:prstGeom prst="rect">
+            <a:avLst/>
+          </a:prstGeom>
+          <a:noFill/>
+        </p:spPr>
+        <p:txBody>
+          <a:bodyPr wrap="none" lIns="0" rIns="0" tIns="0" bIns="0">
+            <a:spAutoFit/>
+          </a:bodyPr>
+          <a:lstStyle/>
+          <a:p>
+            <a:pPr algn="r"/>
+            <a:r>
+              <a:rPr sz="1000">
+                <a:solidFill>
+                  <a:srgbClr val="8A939B"/>
+                </a:solidFill>
+                <a:hlinkClick r:id="rId3"/>
+              </a:rPr>
+              <a:t>cuinotes.com</a:t>
+            </a:r>
+            <a:r>
+              <a:rPr sz="1000">
+                <a:solidFill>
+                  <a:srgbClr val="8A939B"/>
+                </a:solidFill>
+              </a:rPr>
+              <a:t>  ·  11</a:t>
+            </a:r>
           </a:p>
         </p:txBody>
       </p:sp>
@@ -4432,6 +4335,10 @@
           </a:solidFill>
           <a:ln/>
         </p:spPr>
+        <p:txBody>
+          <a:bodyPr/>
+          <a:p/>
+        </p:txBody>
       </p:sp>
       <p:sp>
         <p:nvSpPr>
@@ -4728,6 +4635,10 @@
             </a:outerShdw>
           </a:effectLst>
         </p:spPr>
+        <p:txBody>
+          <a:bodyPr/>
+          <a:p/>
+        </p:txBody>
       </p:sp>
       <p:pic>
         <p:nvPicPr>
@@ -4755,79 +4666,44 @@
       </p:pic>
       <p:sp>
         <p:nvSpPr>
-          <p:cNvPr id="8" name="Text 5"/>
-          <p:cNvSpPr txBox="1"/>
-          <p:nvPr/>
-        </p:nvSpPr>
-        <p:spPr>
-          <a:xfrm>
-            <a:off x="640080" y="6446520"/>
-            <a:ext cx="8686800" cy="292608"/>
-          </a:xfrm>
-          <a:prstGeom prst="rect">
-            <a:avLst/>
-          </a:prstGeom>
-          <a:noFill/>
-          <a:ln/>
-        </p:spPr>
-        <p:txBody>
-          <a:bodyPr wrap="square" lIns="0" tIns="0" rIns="0" bIns="0" rtlCol="0" anchor="ctr"/>
-          <a:lstStyle/>
-          <a:p>
-            <a:pPr algn="l" indent="0" marL="0">
-              <a:buNone/>
-            </a:pPr>
-            <a:r>
-              <a:rPr lang="en-US" sz="900" dirty="0">
-                <a:solidFill>
-                  <a:srgbClr val="5D5D72"/>
-                </a:solidFill>
-                <a:latin typeface="Calibri" pitchFamily="34" charset="0"/>
-                <a:ea typeface="Calibri" pitchFamily="34" charset="-122"/>
-                <a:cs typeface="Calibri" pitchFamily="34" charset="-120"/>
-              </a:rPr>
-              <a:t>Usman Akram  •  COMSATS University Islamabad</a:t>
-            </a:r>
-            <a:endParaRPr lang="en-US" sz="900" dirty="0"/>
-          </a:p>
-        </p:txBody>
-      </p:sp>
-      <p:sp>
-        <p:nvSpPr>
-          <p:cNvPr id="9" name="Text 6"/>
-          <p:cNvSpPr txBox="1"/>
-          <p:nvPr/>
-        </p:nvSpPr>
-        <p:spPr>
-          <a:xfrm>
-            <a:off x="11155680" y="6446520"/>
-            <a:ext cx="457200" cy="292608"/>
-          </a:xfrm>
-          <a:prstGeom prst="rect">
-            <a:avLst/>
-          </a:prstGeom>
-          <a:noFill/>
-          <a:ln/>
-        </p:spPr>
-        <p:txBody>
-          <a:bodyPr wrap="square" lIns="0" tIns="0" rIns="0" bIns="0" rtlCol="0" anchor="ctr"/>
-          <a:lstStyle/>
-          <a:p>
-            <a:pPr algn="r" indent="0" marL="0">
-              <a:buNone/>
-            </a:pPr>
-            <a:r>
-              <a:rPr lang="en-US" sz="900" dirty="0">
-                <a:solidFill>
-                  <a:srgbClr val="5D5D72"/>
-                </a:solidFill>
-                <a:latin typeface="Calibri" pitchFamily="34" charset="0"/>
-                <a:ea typeface="Calibri" pitchFamily="34" charset="-122"/>
-                <a:cs typeface="Calibri" pitchFamily="34" charset="-120"/>
-              </a:rPr>
-              <a:t>12</a:t>
-            </a:r>
-            <a:endParaRPr lang="en-US" sz="900" dirty="0"/>
+          <p:cNvPr id="10" name="cuinotes-footer-mark"/>
+          <p:cNvSpPr txBox="1"/>
+          <p:nvPr/>
+        </p:nvSpPr>
+        <p:spPr>
+          <a:xfrm>
+            <a:off x="9951720" y="6455664"/>
+            <a:ext cx="2011680" cy="292608"/>
+          </a:xfrm>
+          <a:prstGeom prst="rect">
+            <a:avLst/>
+          </a:prstGeom>
+          <a:noFill/>
+        </p:spPr>
+        <p:txBody>
+          <a:bodyPr wrap="none" lIns="0" rIns="0" tIns="0" bIns="0">
+            <a:spAutoFit/>
+          </a:bodyPr>
+          <a:lstStyle/>
+          <a:p>
+            <a:pPr algn="r"/>
+            <a:r>
+              <a:rPr sz="1000">
+                <a:solidFill>
+                  <a:srgbClr val="8A939B"/>
+                </a:solidFill>
+                <a:hlinkClick r:id="rId4"/>
+              </a:rPr>
+              <a:t>cuinotes.com</a:t>
+            </a:r>
+            <a:r>
+              <a:rPr sz="1000">
+                <a:solidFill>
+                  <a:srgbClr val="8A939B"/>
+                </a:solidFill>
+              </a:rPr>
+              <a:t>  ·  12</a:t>
+            </a:r>
           </a:p>
         </p:txBody>
       </p:sp>
@@ -4960,6 +4836,10 @@
           </a:solidFill>
           <a:ln/>
         </p:spPr>
+        <p:txBody>
+          <a:bodyPr/>
+          <a:p/>
+        </p:txBody>
       </p:sp>
       <p:sp>
         <p:nvSpPr>
@@ -5058,6 +4938,10 @@
           </a:solidFill>
           <a:ln/>
         </p:spPr>
+        <p:txBody>
+          <a:bodyPr/>
+          <a:p/>
+        </p:txBody>
       </p:sp>
       <p:sp>
         <p:nvSpPr>
@@ -5139,79 +5023,44 @@
       </p:sp>
       <p:sp>
         <p:nvSpPr>
-          <p:cNvPr id="10" name="Text 8"/>
-          <p:cNvSpPr txBox="1"/>
-          <p:nvPr/>
-        </p:nvSpPr>
-        <p:spPr>
-          <a:xfrm>
-            <a:off x="640080" y="6446520"/>
-            <a:ext cx="8686800" cy="292608"/>
-          </a:xfrm>
-          <a:prstGeom prst="rect">
-            <a:avLst/>
-          </a:prstGeom>
-          <a:noFill/>
-          <a:ln/>
-        </p:spPr>
-        <p:txBody>
-          <a:bodyPr wrap="square" lIns="0" tIns="0" rIns="0" bIns="0" rtlCol="0" anchor="ctr"/>
-          <a:lstStyle/>
-          <a:p>
-            <a:pPr algn="l" indent="0" marL="0">
-              <a:buNone/>
-            </a:pPr>
-            <a:r>
-              <a:rPr lang="en-US" sz="900" dirty="0">
-                <a:solidFill>
-                  <a:srgbClr val="5D5D72"/>
-                </a:solidFill>
-                <a:latin typeface="Calibri" pitchFamily="34" charset="0"/>
-                <a:ea typeface="Calibri" pitchFamily="34" charset="-122"/>
-                <a:cs typeface="Calibri" pitchFamily="34" charset="-120"/>
-              </a:rPr>
-              <a:t>Usman Akram  •  COMSATS University Islamabad</a:t>
-            </a:r>
-            <a:endParaRPr lang="en-US" sz="900" dirty="0"/>
-          </a:p>
-        </p:txBody>
-      </p:sp>
-      <p:sp>
-        <p:nvSpPr>
-          <p:cNvPr id="11" name="Text 9"/>
-          <p:cNvSpPr txBox="1"/>
-          <p:nvPr/>
-        </p:nvSpPr>
-        <p:spPr>
-          <a:xfrm>
-            <a:off x="11155680" y="6446520"/>
-            <a:ext cx="457200" cy="292608"/>
-          </a:xfrm>
-          <a:prstGeom prst="rect">
-            <a:avLst/>
-          </a:prstGeom>
-          <a:noFill/>
-          <a:ln/>
-        </p:spPr>
-        <p:txBody>
-          <a:bodyPr wrap="square" lIns="0" tIns="0" rIns="0" bIns="0" rtlCol="0" anchor="ctr"/>
-          <a:lstStyle/>
-          <a:p>
-            <a:pPr algn="r" indent="0" marL="0">
-              <a:buNone/>
-            </a:pPr>
-            <a:r>
-              <a:rPr lang="en-US" sz="900" dirty="0">
-                <a:solidFill>
-                  <a:srgbClr val="5D5D72"/>
-                </a:solidFill>
-                <a:latin typeface="Calibri" pitchFamily="34" charset="0"/>
-                <a:ea typeface="Calibri" pitchFamily="34" charset="-122"/>
-                <a:cs typeface="Calibri" pitchFamily="34" charset="-120"/>
-              </a:rPr>
-              <a:t>13</a:t>
-            </a:r>
-            <a:endParaRPr lang="en-US" sz="900" dirty="0"/>
+          <p:cNvPr id="12" name="cuinotes-footer-mark"/>
+          <p:cNvSpPr txBox="1"/>
+          <p:nvPr/>
+        </p:nvSpPr>
+        <p:spPr>
+          <a:xfrm>
+            <a:off x="9951720" y="6455664"/>
+            <a:ext cx="2011680" cy="292608"/>
+          </a:xfrm>
+          <a:prstGeom prst="rect">
+            <a:avLst/>
+          </a:prstGeom>
+          <a:noFill/>
+        </p:spPr>
+        <p:txBody>
+          <a:bodyPr wrap="none" lIns="0" rIns="0" tIns="0" bIns="0">
+            <a:spAutoFit/>
+          </a:bodyPr>
+          <a:lstStyle/>
+          <a:p>
+            <a:pPr algn="r"/>
+            <a:r>
+              <a:rPr sz="1000">
+                <a:solidFill>
+                  <a:srgbClr val="8A939B"/>
+                </a:solidFill>
+                <a:hlinkClick r:id="rId3"/>
+              </a:rPr>
+              <a:t>cuinotes.com</a:t>
+            </a:r>
+            <a:r>
+              <a:rPr sz="1000">
+                <a:solidFill>
+                  <a:srgbClr val="8A939B"/>
+                </a:solidFill>
+              </a:rPr>
+              <a:t>  ·  13</a:t>
+            </a:r>
           </a:p>
         </p:txBody>
       </p:sp>
@@ -5346,6 +5195,10 @@
           </a:solidFill>
           <a:ln/>
         </p:spPr>
+        <p:txBody>
+          <a:bodyPr/>
+          <a:p/>
+        </p:txBody>
       </p:sp>
       <p:sp>
         <p:nvSpPr>
@@ -5560,79 +5413,44 @@
       </p:sp>
       <p:sp>
         <p:nvSpPr>
-          <p:cNvPr id="6" name="Text 4"/>
-          <p:cNvSpPr txBox="1"/>
-          <p:nvPr/>
-        </p:nvSpPr>
-        <p:spPr>
-          <a:xfrm>
-            <a:off x="640080" y="6446520"/>
-            <a:ext cx="8686800" cy="292608"/>
-          </a:xfrm>
-          <a:prstGeom prst="rect">
-            <a:avLst/>
-          </a:prstGeom>
-          <a:noFill/>
-          <a:ln/>
-        </p:spPr>
-        <p:txBody>
-          <a:bodyPr wrap="square" lIns="0" tIns="0" rIns="0" bIns="0" rtlCol="0" anchor="ctr"/>
-          <a:lstStyle/>
-          <a:p>
-            <a:pPr algn="l" indent="0" marL="0">
-              <a:buNone/>
-            </a:pPr>
-            <a:r>
-              <a:rPr lang="en-US" sz="900" dirty="0">
-                <a:solidFill>
-                  <a:srgbClr val="5D5D72"/>
-                </a:solidFill>
-                <a:latin typeface="Calibri" pitchFamily="34" charset="0"/>
-                <a:ea typeface="Calibri" pitchFamily="34" charset="-122"/>
-                <a:cs typeface="Calibri" pitchFamily="34" charset="-120"/>
-              </a:rPr>
-              <a:t>Usman Akram  •  COMSATS University Islamabad</a:t>
-            </a:r>
-            <a:endParaRPr lang="en-US" sz="900" dirty="0"/>
-          </a:p>
-        </p:txBody>
-      </p:sp>
-      <p:sp>
-        <p:nvSpPr>
-          <p:cNvPr id="7" name="Text 5"/>
-          <p:cNvSpPr txBox="1"/>
-          <p:nvPr/>
-        </p:nvSpPr>
-        <p:spPr>
-          <a:xfrm>
-            <a:off x="11155680" y="6446520"/>
-            <a:ext cx="457200" cy="292608"/>
-          </a:xfrm>
-          <a:prstGeom prst="rect">
-            <a:avLst/>
-          </a:prstGeom>
-          <a:noFill/>
-          <a:ln/>
-        </p:spPr>
-        <p:txBody>
-          <a:bodyPr wrap="square" lIns="0" tIns="0" rIns="0" bIns="0" rtlCol="0" anchor="ctr"/>
-          <a:lstStyle/>
-          <a:p>
-            <a:pPr algn="r" indent="0" marL="0">
-              <a:buNone/>
-            </a:pPr>
-            <a:r>
-              <a:rPr lang="en-US" sz="900" dirty="0">
-                <a:solidFill>
-                  <a:srgbClr val="5D5D72"/>
-                </a:solidFill>
-                <a:latin typeface="Calibri" pitchFamily="34" charset="0"/>
-                <a:ea typeface="Calibri" pitchFamily="34" charset="-122"/>
-                <a:cs typeface="Calibri" pitchFamily="34" charset="-120"/>
-              </a:rPr>
-              <a:t>14</a:t>
-            </a:r>
-            <a:endParaRPr lang="en-US" sz="900" dirty="0"/>
+          <p:cNvPr id="8" name="cuinotes-footer-mark"/>
+          <p:cNvSpPr txBox="1"/>
+          <p:nvPr/>
+        </p:nvSpPr>
+        <p:spPr>
+          <a:xfrm>
+            <a:off x="9951720" y="6455664"/>
+            <a:ext cx="2011680" cy="292608"/>
+          </a:xfrm>
+          <a:prstGeom prst="rect">
+            <a:avLst/>
+          </a:prstGeom>
+          <a:noFill/>
+        </p:spPr>
+        <p:txBody>
+          <a:bodyPr wrap="none" lIns="0" rIns="0" tIns="0" bIns="0">
+            <a:spAutoFit/>
+          </a:bodyPr>
+          <a:lstStyle/>
+          <a:p>
+            <a:pPr algn="r"/>
+            <a:r>
+              <a:rPr sz="1000">
+                <a:solidFill>
+                  <a:srgbClr val="8A939B"/>
+                </a:solidFill>
+                <a:hlinkClick r:id="rId3"/>
+              </a:rPr>
+              <a:t>cuinotes.com</a:t>
+            </a:r>
+            <a:r>
+              <a:rPr sz="1000">
+                <a:solidFill>
+                  <a:srgbClr val="8A939B"/>
+                </a:solidFill>
+              </a:rPr>
+              <a:t>  ·  14</a:t>
+            </a:r>
           </a:p>
         </p:txBody>
       </p:sp>
@@ -5772,6 +5590,10 @@
             <a:prstDash val="solid"/>
           </a:ln>
         </p:spPr>
+        <p:txBody>
+          <a:bodyPr/>
+          <a:p/>
+        </p:txBody>
       </p:sp>
       <p:sp>
         <p:nvSpPr>
@@ -5853,79 +5675,44 @@
       </p:sp>
       <p:sp>
         <p:nvSpPr>
-          <p:cNvPr id="7" name="Text 5"/>
-          <p:cNvSpPr txBox="1"/>
-          <p:nvPr/>
-        </p:nvSpPr>
-        <p:spPr>
-          <a:xfrm>
-            <a:off x="640080" y="6446520"/>
-            <a:ext cx="8686800" cy="292608"/>
-          </a:xfrm>
-          <a:prstGeom prst="rect">
-            <a:avLst/>
-          </a:prstGeom>
-          <a:noFill/>
-          <a:ln/>
-        </p:spPr>
-        <p:txBody>
-          <a:bodyPr wrap="square" lIns="0" tIns="0" rIns="0" bIns="0" rtlCol="0" anchor="ctr"/>
-          <a:lstStyle/>
-          <a:p>
-            <a:pPr algn="l" indent="0" marL="0">
-              <a:buNone/>
-            </a:pPr>
-            <a:r>
-              <a:rPr lang="en-US" sz="900" dirty="0">
-                <a:solidFill>
-                  <a:srgbClr val="5D5D72"/>
-                </a:solidFill>
-                <a:latin typeface="Calibri" pitchFamily="34" charset="0"/>
-                <a:ea typeface="Calibri" pitchFamily="34" charset="-122"/>
-                <a:cs typeface="Calibri" pitchFamily="34" charset="-120"/>
-              </a:rPr>
-              <a:t>Usman Akram  •  COMSATS University Islamabad</a:t>
-            </a:r>
-            <a:endParaRPr lang="en-US" sz="900" dirty="0"/>
-          </a:p>
-        </p:txBody>
-      </p:sp>
-      <p:sp>
-        <p:nvSpPr>
-          <p:cNvPr id="8" name="Text 6"/>
-          <p:cNvSpPr txBox="1"/>
-          <p:nvPr/>
-        </p:nvSpPr>
-        <p:spPr>
-          <a:xfrm>
-            <a:off x="11155680" y="6446520"/>
-            <a:ext cx="457200" cy="292608"/>
-          </a:xfrm>
-          <a:prstGeom prst="rect">
-            <a:avLst/>
-          </a:prstGeom>
-          <a:noFill/>
-          <a:ln/>
-        </p:spPr>
-        <p:txBody>
-          <a:bodyPr wrap="square" lIns="0" tIns="0" rIns="0" bIns="0" rtlCol="0" anchor="ctr"/>
-          <a:lstStyle/>
-          <a:p>
-            <a:pPr algn="r" indent="0" marL="0">
-              <a:buNone/>
-            </a:pPr>
-            <a:r>
-              <a:rPr lang="en-US" sz="900" dirty="0">
-                <a:solidFill>
-                  <a:srgbClr val="5D5D72"/>
-                </a:solidFill>
-                <a:latin typeface="Calibri" pitchFamily="34" charset="0"/>
-                <a:ea typeface="Calibri" pitchFamily="34" charset="-122"/>
-                <a:cs typeface="Calibri" pitchFamily="34" charset="-120"/>
-              </a:rPr>
-              <a:t>15</a:t>
-            </a:r>
-            <a:endParaRPr lang="en-US" sz="900" dirty="0"/>
+          <p:cNvPr id="9" name="cuinotes-footer-mark"/>
+          <p:cNvSpPr txBox="1"/>
+          <p:nvPr/>
+        </p:nvSpPr>
+        <p:spPr>
+          <a:xfrm>
+            <a:off x="9951720" y="6455664"/>
+            <a:ext cx="2011680" cy="292608"/>
+          </a:xfrm>
+          <a:prstGeom prst="rect">
+            <a:avLst/>
+          </a:prstGeom>
+          <a:noFill/>
+        </p:spPr>
+        <p:txBody>
+          <a:bodyPr wrap="none" lIns="0" rIns="0" tIns="0" bIns="0">
+            <a:spAutoFit/>
+          </a:bodyPr>
+          <a:lstStyle/>
+          <a:p>
+            <a:pPr algn="r"/>
+            <a:r>
+              <a:rPr sz="1000">
+                <a:solidFill>
+                  <a:srgbClr val="8A939B"/>
+                </a:solidFill>
+                <a:hlinkClick r:id="rId3"/>
+              </a:rPr>
+              <a:t>cuinotes.com</a:t>
+            </a:r>
+            <a:r>
+              <a:rPr sz="1000">
+                <a:solidFill>
+                  <a:srgbClr val="8A939B"/>
+                </a:solidFill>
+              </a:rPr>
+              <a:t>  ·  15</a:t>
+            </a:r>
           </a:p>
         </p:txBody>
       </p:sp>
@@ -6058,6 +5845,10 @@
           </a:solidFill>
           <a:ln/>
         </p:spPr>
+        <p:txBody>
+          <a:bodyPr/>
+          <a:p/>
+        </p:txBody>
       </p:sp>
       <p:sp>
         <p:nvSpPr>
@@ -6156,6 +5947,10 @@
           </a:solidFill>
           <a:ln/>
         </p:spPr>
+        <p:txBody>
+          <a:bodyPr/>
+          <a:p/>
+        </p:txBody>
       </p:sp>
       <p:sp>
         <p:nvSpPr>
@@ -6237,79 +6032,44 @@
       </p:sp>
       <p:sp>
         <p:nvSpPr>
-          <p:cNvPr id="10" name="Text 8"/>
-          <p:cNvSpPr txBox="1"/>
-          <p:nvPr/>
-        </p:nvSpPr>
-        <p:spPr>
-          <a:xfrm>
-            <a:off x="640080" y="6446520"/>
-            <a:ext cx="8686800" cy="292608"/>
-          </a:xfrm>
-          <a:prstGeom prst="rect">
-            <a:avLst/>
-          </a:prstGeom>
-          <a:noFill/>
-          <a:ln/>
-        </p:spPr>
-        <p:txBody>
-          <a:bodyPr wrap="square" lIns="0" tIns="0" rIns="0" bIns="0" rtlCol="0" anchor="ctr"/>
-          <a:lstStyle/>
-          <a:p>
-            <a:pPr algn="l" indent="0" marL="0">
-              <a:buNone/>
-            </a:pPr>
-            <a:r>
-              <a:rPr lang="en-US" sz="900" dirty="0">
-                <a:solidFill>
-                  <a:srgbClr val="5D5D72"/>
-                </a:solidFill>
-                <a:latin typeface="Calibri" pitchFamily="34" charset="0"/>
-                <a:ea typeface="Calibri" pitchFamily="34" charset="-122"/>
-                <a:cs typeface="Calibri" pitchFamily="34" charset="-120"/>
-              </a:rPr>
-              <a:t>Usman Akram  •  COMSATS University Islamabad</a:t>
-            </a:r>
-            <a:endParaRPr lang="en-US" sz="900" dirty="0"/>
-          </a:p>
-        </p:txBody>
-      </p:sp>
-      <p:sp>
-        <p:nvSpPr>
-          <p:cNvPr id="11" name="Text 9"/>
-          <p:cNvSpPr txBox="1"/>
-          <p:nvPr/>
-        </p:nvSpPr>
-        <p:spPr>
-          <a:xfrm>
-            <a:off x="11155680" y="6446520"/>
-            <a:ext cx="457200" cy="292608"/>
-          </a:xfrm>
-          <a:prstGeom prst="rect">
-            <a:avLst/>
-          </a:prstGeom>
-          <a:noFill/>
-          <a:ln/>
-        </p:spPr>
-        <p:txBody>
-          <a:bodyPr wrap="square" lIns="0" tIns="0" rIns="0" bIns="0" rtlCol="0" anchor="ctr"/>
-          <a:lstStyle/>
-          <a:p>
-            <a:pPr algn="r" indent="0" marL="0">
-              <a:buNone/>
-            </a:pPr>
-            <a:r>
-              <a:rPr lang="en-US" sz="900" dirty="0">
-                <a:solidFill>
-                  <a:srgbClr val="5D5D72"/>
-                </a:solidFill>
-                <a:latin typeface="Calibri" pitchFamily="34" charset="0"/>
-                <a:ea typeface="Calibri" pitchFamily="34" charset="-122"/>
-                <a:cs typeface="Calibri" pitchFamily="34" charset="-120"/>
-              </a:rPr>
-              <a:t>16</a:t>
-            </a:r>
-            <a:endParaRPr lang="en-US" sz="900" dirty="0"/>
+          <p:cNvPr id="12" name="cuinotes-footer-mark"/>
+          <p:cNvSpPr txBox="1"/>
+          <p:nvPr/>
+        </p:nvSpPr>
+        <p:spPr>
+          <a:xfrm>
+            <a:off x="9951720" y="6455664"/>
+            <a:ext cx="2011680" cy="292608"/>
+          </a:xfrm>
+          <a:prstGeom prst="rect">
+            <a:avLst/>
+          </a:prstGeom>
+          <a:noFill/>
+        </p:spPr>
+        <p:txBody>
+          <a:bodyPr wrap="none" lIns="0" rIns="0" tIns="0" bIns="0">
+            <a:spAutoFit/>
+          </a:bodyPr>
+          <a:lstStyle/>
+          <a:p>
+            <a:pPr algn="r"/>
+            <a:r>
+              <a:rPr sz="1000">
+                <a:solidFill>
+                  <a:srgbClr val="8A939B"/>
+                </a:solidFill>
+                <a:hlinkClick r:id="rId3"/>
+              </a:rPr>
+              <a:t>cuinotes.com</a:t>
+            </a:r>
+            <a:r>
+              <a:rPr sz="1000">
+                <a:solidFill>
+                  <a:srgbClr val="8A939B"/>
+                </a:solidFill>
+              </a:rPr>
+              <a:t>  ·  16</a:t>
+            </a:r>
           </a:p>
         </p:txBody>
       </p:sp>
@@ -6444,6 +6204,10 @@
           </a:solidFill>
           <a:ln/>
         </p:spPr>
+        <p:txBody>
+          <a:bodyPr/>
+          <a:p/>
+        </p:txBody>
       </p:sp>
       <p:sp>
         <p:nvSpPr>
@@ -6658,79 +6422,44 @@
       </p:sp>
       <p:sp>
         <p:nvSpPr>
-          <p:cNvPr id="6" name="Text 4"/>
-          <p:cNvSpPr txBox="1"/>
-          <p:nvPr/>
-        </p:nvSpPr>
-        <p:spPr>
-          <a:xfrm>
-            <a:off x="640080" y="6446520"/>
-            <a:ext cx="8686800" cy="292608"/>
-          </a:xfrm>
-          <a:prstGeom prst="rect">
-            <a:avLst/>
-          </a:prstGeom>
-          <a:noFill/>
-          <a:ln/>
-        </p:spPr>
-        <p:txBody>
-          <a:bodyPr wrap="square" lIns="0" tIns="0" rIns="0" bIns="0" rtlCol="0" anchor="ctr"/>
-          <a:lstStyle/>
-          <a:p>
-            <a:pPr algn="l" indent="0" marL="0">
-              <a:buNone/>
-            </a:pPr>
-            <a:r>
-              <a:rPr lang="en-US" sz="900" dirty="0">
-                <a:solidFill>
-                  <a:srgbClr val="5D5D72"/>
-                </a:solidFill>
-                <a:latin typeface="Calibri" pitchFamily="34" charset="0"/>
-                <a:ea typeface="Calibri" pitchFamily="34" charset="-122"/>
-                <a:cs typeface="Calibri" pitchFamily="34" charset="-120"/>
-              </a:rPr>
-              <a:t>Usman Akram  •  COMSATS University Islamabad</a:t>
-            </a:r>
-            <a:endParaRPr lang="en-US" sz="900" dirty="0"/>
-          </a:p>
-        </p:txBody>
-      </p:sp>
-      <p:sp>
-        <p:nvSpPr>
-          <p:cNvPr id="7" name="Text 5"/>
-          <p:cNvSpPr txBox="1"/>
-          <p:nvPr/>
-        </p:nvSpPr>
-        <p:spPr>
-          <a:xfrm>
-            <a:off x="11155680" y="6446520"/>
-            <a:ext cx="457200" cy="292608"/>
-          </a:xfrm>
-          <a:prstGeom prst="rect">
-            <a:avLst/>
-          </a:prstGeom>
-          <a:noFill/>
-          <a:ln/>
-        </p:spPr>
-        <p:txBody>
-          <a:bodyPr wrap="square" lIns="0" tIns="0" rIns="0" bIns="0" rtlCol="0" anchor="ctr"/>
-          <a:lstStyle/>
-          <a:p>
-            <a:pPr algn="r" indent="0" marL="0">
-              <a:buNone/>
-            </a:pPr>
-            <a:r>
-              <a:rPr lang="en-US" sz="900" dirty="0">
-                <a:solidFill>
-                  <a:srgbClr val="5D5D72"/>
-                </a:solidFill>
-                <a:latin typeface="Calibri" pitchFamily="34" charset="0"/>
-                <a:ea typeface="Calibri" pitchFamily="34" charset="-122"/>
-                <a:cs typeface="Calibri" pitchFamily="34" charset="-120"/>
-              </a:rPr>
-              <a:t>17</a:t>
-            </a:r>
-            <a:endParaRPr lang="en-US" sz="900" dirty="0"/>
+          <p:cNvPr id="8" name="cuinotes-footer-mark"/>
+          <p:cNvSpPr txBox="1"/>
+          <p:nvPr/>
+        </p:nvSpPr>
+        <p:spPr>
+          <a:xfrm>
+            <a:off x="9951720" y="6455664"/>
+            <a:ext cx="2011680" cy="292608"/>
+          </a:xfrm>
+          <a:prstGeom prst="rect">
+            <a:avLst/>
+          </a:prstGeom>
+          <a:noFill/>
+        </p:spPr>
+        <p:txBody>
+          <a:bodyPr wrap="none" lIns="0" rIns="0" tIns="0" bIns="0">
+            <a:spAutoFit/>
+          </a:bodyPr>
+          <a:lstStyle/>
+          <a:p>
+            <a:pPr algn="r"/>
+            <a:r>
+              <a:rPr sz="1000">
+                <a:solidFill>
+                  <a:srgbClr val="8A939B"/>
+                </a:solidFill>
+                <a:hlinkClick r:id="rId3"/>
+              </a:rPr>
+              <a:t>cuinotes.com</a:t>
+            </a:r>
+            <a:r>
+              <a:rPr sz="1000">
+                <a:solidFill>
+                  <a:srgbClr val="8A939B"/>
+                </a:solidFill>
+              </a:rPr>
+              <a:t>  ·  17</a:t>
+            </a:r>
           </a:p>
         </p:txBody>
       </p:sp>
@@ -6863,6 +6592,10 @@
           </a:solidFill>
           <a:ln/>
         </p:spPr>
+        <p:txBody>
+          <a:bodyPr/>
+          <a:p/>
+        </p:txBody>
       </p:sp>
       <p:sp>
         <p:nvSpPr>
@@ -6961,6 +6694,10 @@
           </a:solidFill>
           <a:ln/>
         </p:spPr>
+        <p:txBody>
+          <a:bodyPr/>
+          <a:p/>
+        </p:txBody>
       </p:sp>
       <p:sp>
         <p:nvSpPr>
@@ -7059,6 +6796,10 @@
           </a:solidFill>
           <a:ln/>
         </p:spPr>
+        <p:txBody>
+          <a:bodyPr/>
+          <a:p/>
+        </p:txBody>
       </p:sp>
       <p:sp>
         <p:nvSpPr>
@@ -7140,79 +6881,44 @@
       </p:sp>
       <p:sp>
         <p:nvSpPr>
-          <p:cNvPr id="13" name="Text 11"/>
-          <p:cNvSpPr txBox="1"/>
-          <p:nvPr/>
-        </p:nvSpPr>
-        <p:spPr>
-          <a:xfrm>
-            <a:off x="640080" y="6446520"/>
-            <a:ext cx="8686800" cy="292608"/>
-          </a:xfrm>
-          <a:prstGeom prst="rect">
-            <a:avLst/>
-          </a:prstGeom>
-          <a:noFill/>
-          <a:ln/>
-        </p:spPr>
-        <p:txBody>
-          <a:bodyPr wrap="square" lIns="0" tIns="0" rIns="0" bIns="0" rtlCol="0" anchor="ctr"/>
-          <a:lstStyle/>
-          <a:p>
-            <a:pPr algn="l" indent="0" marL="0">
-              <a:buNone/>
-            </a:pPr>
-            <a:r>
-              <a:rPr lang="en-US" sz="900" dirty="0">
-                <a:solidFill>
-                  <a:srgbClr val="5D5D72"/>
-                </a:solidFill>
-                <a:latin typeface="Calibri" pitchFamily="34" charset="0"/>
-                <a:ea typeface="Calibri" pitchFamily="34" charset="-122"/>
-                <a:cs typeface="Calibri" pitchFamily="34" charset="-120"/>
-              </a:rPr>
-              <a:t>Usman Akram  •  COMSATS University Islamabad</a:t>
-            </a:r>
-            <a:endParaRPr lang="en-US" sz="900" dirty="0"/>
-          </a:p>
-        </p:txBody>
-      </p:sp>
-      <p:sp>
-        <p:nvSpPr>
-          <p:cNvPr id="14" name="Text 12"/>
-          <p:cNvSpPr txBox="1"/>
-          <p:nvPr/>
-        </p:nvSpPr>
-        <p:spPr>
-          <a:xfrm>
-            <a:off x="11155680" y="6446520"/>
-            <a:ext cx="457200" cy="292608"/>
-          </a:xfrm>
-          <a:prstGeom prst="rect">
-            <a:avLst/>
-          </a:prstGeom>
-          <a:noFill/>
-          <a:ln/>
-        </p:spPr>
-        <p:txBody>
-          <a:bodyPr wrap="square" lIns="0" tIns="0" rIns="0" bIns="0" rtlCol="0" anchor="ctr"/>
-          <a:lstStyle/>
-          <a:p>
-            <a:pPr algn="r" indent="0" marL="0">
-              <a:buNone/>
-            </a:pPr>
-            <a:r>
-              <a:rPr lang="en-US" sz="900" dirty="0">
-                <a:solidFill>
-                  <a:srgbClr val="5D5D72"/>
-                </a:solidFill>
-                <a:latin typeface="Calibri" pitchFamily="34" charset="0"/>
-                <a:ea typeface="Calibri" pitchFamily="34" charset="-122"/>
-                <a:cs typeface="Calibri" pitchFamily="34" charset="-120"/>
-              </a:rPr>
-              <a:t>18</a:t>
-            </a:r>
-            <a:endParaRPr lang="en-US" sz="900" dirty="0"/>
+          <p:cNvPr id="15" name="cuinotes-footer-mark"/>
+          <p:cNvSpPr txBox="1"/>
+          <p:nvPr/>
+        </p:nvSpPr>
+        <p:spPr>
+          <a:xfrm>
+            <a:off x="9951720" y="6455664"/>
+            <a:ext cx="2011680" cy="292608"/>
+          </a:xfrm>
+          <a:prstGeom prst="rect">
+            <a:avLst/>
+          </a:prstGeom>
+          <a:noFill/>
+        </p:spPr>
+        <p:txBody>
+          <a:bodyPr wrap="none" lIns="0" rIns="0" tIns="0" bIns="0">
+            <a:spAutoFit/>
+          </a:bodyPr>
+          <a:lstStyle/>
+          <a:p>
+            <a:pPr algn="r"/>
+            <a:r>
+              <a:rPr sz="1000">
+                <a:solidFill>
+                  <a:srgbClr val="8A939B"/>
+                </a:solidFill>
+                <a:hlinkClick r:id="rId3"/>
+              </a:rPr>
+              <a:t>cuinotes.com</a:t>
+            </a:r>
+            <a:r>
+              <a:rPr sz="1000">
+                <a:solidFill>
+                  <a:srgbClr val="8A939B"/>
+                </a:solidFill>
+              </a:rPr>
+              <a:t>  ·  18</a:t>
+            </a:r>
           </a:p>
         </p:txBody>
       </p:sp>
@@ -7347,6 +7053,10 @@
           </a:solidFill>
           <a:ln/>
         </p:spPr>
+        <p:txBody>
+          <a:bodyPr/>
+          <a:p/>
+        </p:txBody>
       </p:sp>
       <p:sp>
         <p:nvSpPr>
@@ -7529,79 +7239,44 @@
       </p:sp>
       <p:sp>
         <p:nvSpPr>
-          <p:cNvPr id="7" name="Text 5"/>
-          <p:cNvSpPr txBox="1"/>
-          <p:nvPr/>
-        </p:nvSpPr>
-        <p:spPr>
-          <a:xfrm>
-            <a:off x="640080" y="6446520"/>
-            <a:ext cx="8686800" cy="292608"/>
-          </a:xfrm>
-          <a:prstGeom prst="rect">
-            <a:avLst/>
-          </a:prstGeom>
-          <a:noFill/>
-          <a:ln/>
-        </p:spPr>
-        <p:txBody>
-          <a:bodyPr wrap="square" lIns="0" tIns="0" rIns="0" bIns="0" rtlCol="0" anchor="ctr"/>
-          <a:lstStyle/>
-          <a:p>
-            <a:pPr algn="l" indent="0" marL="0">
-              <a:buNone/>
-            </a:pPr>
-            <a:r>
-              <a:rPr lang="en-US" sz="900" dirty="0">
-                <a:solidFill>
-                  <a:srgbClr val="5D5D72"/>
-                </a:solidFill>
-                <a:latin typeface="Calibri" pitchFamily="34" charset="0"/>
-                <a:ea typeface="Calibri" pitchFamily="34" charset="-122"/>
-                <a:cs typeface="Calibri" pitchFamily="34" charset="-120"/>
-              </a:rPr>
-              <a:t>Usman Akram  •  COMSATS University Islamabad</a:t>
-            </a:r>
-            <a:endParaRPr lang="en-US" sz="900" dirty="0"/>
-          </a:p>
-        </p:txBody>
-      </p:sp>
-      <p:sp>
-        <p:nvSpPr>
-          <p:cNvPr id="8" name="Text 6"/>
-          <p:cNvSpPr txBox="1"/>
-          <p:nvPr/>
-        </p:nvSpPr>
-        <p:spPr>
-          <a:xfrm>
-            <a:off x="11155680" y="6446520"/>
-            <a:ext cx="457200" cy="292608"/>
-          </a:xfrm>
-          <a:prstGeom prst="rect">
-            <a:avLst/>
-          </a:prstGeom>
-          <a:noFill/>
-          <a:ln/>
-        </p:spPr>
-        <p:txBody>
-          <a:bodyPr wrap="square" lIns="0" tIns="0" rIns="0" bIns="0" rtlCol="0" anchor="ctr"/>
-          <a:lstStyle/>
-          <a:p>
-            <a:pPr algn="r" indent="0" marL="0">
-              <a:buNone/>
-            </a:pPr>
-            <a:r>
-              <a:rPr lang="en-US" sz="900" dirty="0">
-                <a:solidFill>
-                  <a:srgbClr val="5D5D72"/>
-                </a:solidFill>
-                <a:latin typeface="Calibri" pitchFamily="34" charset="0"/>
-                <a:ea typeface="Calibri" pitchFamily="34" charset="-122"/>
-                <a:cs typeface="Calibri" pitchFamily="34" charset="-120"/>
-              </a:rPr>
-              <a:t>19</a:t>
-            </a:r>
-            <a:endParaRPr lang="en-US" sz="900" dirty="0"/>
+          <p:cNvPr id="9" name="cuinotes-footer-mark"/>
+          <p:cNvSpPr txBox="1"/>
+          <p:nvPr/>
+        </p:nvSpPr>
+        <p:spPr>
+          <a:xfrm>
+            <a:off x="9951720" y="6455664"/>
+            <a:ext cx="2011680" cy="292608"/>
+          </a:xfrm>
+          <a:prstGeom prst="rect">
+            <a:avLst/>
+          </a:prstGeom>
+          <a:noFill/>
+        </p:spPr>
+        <p:txBody>
+          <a:bodyPr wrap="none" lIns="0" rIns="0" tIns="0" bIns="0">
+            <a:spAutoFit/>
+          </a:bodyPr>
+          <a:lstStyle/>
+          <a:p>
+            <a:pPr algn="r"/>
+            <a:r>
+              <a:rPr sz="1000">
+                <a:solidFill>
+                  <a:srgbClr val="8A939B"/>
+                </a:solidFill>
+                <a:hlinkClick r:id="rId3"/>
+              </a:rPr>
+              <a:t>cuinotes.com</a:t>
+            </a:r>
+            <a:r>
+              <a:rPr sz="1000">
+                <a:solidFill>
+                  <a:srgbClr val="8A939B"/>
+                </a:solidFill>
+              </a:rPr>
+              <a:t>  ·  19</a:t>
+            </a:r>
           </a:p>
         </p:txBody>
       </p:sp>
@@ -7734,6 +7409,10 @@
           </a:solidFill>
           <a:ln/>
         </p:spPr>
+        <p:txBody>
+          <a:bodyPr/>
+          <a:p/>
+        </p:txBody>
       </p:sp>
       <p:sp>
         <p:nvSpPr>
@@ -7832,6 +7511,10 @@
           </a:solidFill>
           <a:ln/>
         </p:spPr>
+        <p:txBody>
+          <a:bodyPr/>
+          <a:p/>
+        </p:txBody>
       </p:sp>
       <p:sp>
         <p:nvSpPr>
@@ -7930,6 +7613,10 @@
           </a:solidFill>
           <a:ln/>
         </p:spPr>
+        <p:txBody>
+          <a:bodyPr/>
+          <a:p/>
+        </p:txBody>
       </p:sp>
       <p:sp>
         <p:nvSpPr>
@@ -8028,6 +7715,10 @@
           </a:solidFill>
           <a:ln/>
         </p:spPr>
+        <p:txBody>
+          <a:bodyPr/>
+          <a:p/>
+        </p:txBody>
       </p:sp>
       <p:sp>
         <p:nvSpPr>
@@ -8126,6 +7817,10 @@
           </a:solidFill>
           <a:ln/>
         </p:spPr>
+        <p:txBody>
+          <a:bodyPr/>
+          <a:p/>
+        </p:txBody>
       </p:sp>
       <p:sp>
         <p:nvSpPr>
@@ -8207,79 +7902,44 @@
       </p:sp>
       <p:sp>
         <p:nvSpPr>
-          <p:cNvPr id="19" name="Text 17"/>
-          <p:cNvSpPr txBox="1"/>
-          <p:nvPr/>
-        </p:nvSpPr>
-        <p:spPr>
-          <a:xfrm>
-            <a:off x="640080" y="6446520"/>
-            <a:ext cx="8686800" cy="292608"/>
-          </a:xfrm>
-          <a:prstGeom prst="rect">
-            <a:avLst/>
-          </a:prstGeom>
-          <a:noFill/>
-          <a:ln/>
-        </p:spPr>
-        <p:txBody>
-          <a:bodyPr wrap="square" lIns="0" tIns="0" rIns="0" bIns="0" rtlCol="0" anchor="ctr"/>
-          <a:lstStyle/>
-          <a:p>
-            <a:pPr algn="l" indent="0" marL="0">
-              <a:buNone/>
-            </a:pPr>
-            <a:r>
-              <a:rPr lang="en-US" sz="900" dirty="0">
-                <a:solidFill>
-                  <a:srgbClr val="5D5D72"/>
-                </a:solidFill>
-                <a:latin typeface="Calibri" pitchFamily="34" charset="0"/>
-                <a:ea typeface="Calibri" pitchFamily="34" charset="-122"/>
-                <a:cs typeface="Calibri" pitchFamily="34" charset="-120"/>
-              </a:rPr>
-              <a:t>Usman Akram  •  COMSATS University Islamabad</a:t>
-            </a:r>
-            <a:endParaRPr lang="en-US" sz="900" dirty="0"/>
-          </a:p>
-        </p:txBody>
-      </p:sp>
-      <p:sp>
-        <p:nvSpPr>
-          <p:cNvPr id="20" name="Text 18"/>
-          <p:cNvSpPr txBox="1"/>
-          <p:nvPr/>
-        </p:nvSpPr>
-        <p:spPr>
-          <a:xfrm>
-            <a:off x="11155680" y="6446520"/>
-            <a:ext cx="457200" cy="292608"/>
-          </a:xfrm>
-          <a:prstGeom prst="rect">
-            <a:avLst/>
-          </a:prstGeom>
-          <a:noFill/>
-          <a:ln/>
-        </p:spPr>
-        <p:txBody>
-          <a:bodyPr wrap="square" lIns="0" tIns="0" rIns="0" bIns="0" rtlCol="0" anchor="ctr"/>
-          <a:lstStyle/>
-          <a:p>
-            <a:pPr algn="r" indent="0" marL="0">
-              <a:buNone/>
-            </a:pPr>
-            <a:r>
-              <a:rPr lang="en-US" sz="900" dirty="0">
-                <a:solidFill>
-                  <a:srgbClr val="5D5D72"/>
-                </a:solidFill>
-                <a:latin typeface="Calibri" pitchFamily="34" charset="0"/>
-                <a:ea typeface="Calibri" pitchFamily="34" charset="-122"/>
-                <a:cs typeface="Calibri" pitchFamily="34" charset="-120"/>
-              </a:rPr>
-              <a:t>2</a:t>
-            </a:r>
-            <a:endParaRPr lang="en-US" sz="900" dirty="0"/>
+          <p:cNvPr id="21" name="cuinotes-footer-mark"/>
+          <p:cNvSpPr txBox="1"/>
+          <p:nvPr/>
+        </p:nvSpPr>
+        <p:spPr>
+          <a:xfrm>
+            <a:off x="9951720" y="6455664"/>
+            <a:ext cx="2011680" cy="292608"/>
+          </a:xfrm>
+          <a:prstGeom prst="rect">
+            <a:avLst/>
+          </a:prstGeom>
+          <a:noFill/>
+        </p:spPr>
+        <p:txBody>
+          <a:bodyPr wrap="none" lIns="0" rIns="0" tIns="0" bIns="0">
+            <a:spAutoFit/>
+          </a:bodyPr>
+          <a:lstStyle/>
+          <a:p>
+            <a:pPr algn="r"/>
+            <a:r>
+              <a:rPr sz="1000">
+                <a:solidFill>
+                  <a:srgbClr val="8A939B"/>
+                </a:solidFill>
+                <a:hlinkClick r:id="rId3"/>
+              </a:rPr>
+              <a:t>cuinotes.com</a:t>
+            </a:r>
+            <a:r>
+              <a:rPr sz="1000">
+                <a:solidFill>
+                  <a:srgbClr val="8A939B"/>
+                </a:solidFill>
+              </a:rPr>
+              <a:t>  ·  2</a:t>
+            </a:r>
           </a:p>
         </p:txBody>
       </p:sp>
@@ -8419,6 +8079,10 @@
             <a:prstDash val="solid"/>
           </a:ln>
         </p:spPr>
+        <p:txBody>
+          <a:bodyPr/>
+          <a:p/>
+        </p:txBody>
       </p:sp>
       <p:sp>
         <p:nvSpPr>
@@ -8500,79 +8164,44 @@
       </p:sp>
       <p:sp>
         <p:nvSpPr>
-          <p:cNvPr id="7" name="Text 5"/>
-          <p:cNvSpPr txBox="1"/>
-          <p:nvPr/>
-        </p:nvSpPr>
-        <p:spPr>
-          <a:xfrm>
-            <a:off x="640080" y="6446520"/>
-            <a:ext cx="8686800" cy="292608"/>
-          </a:xfrm>
-          <a:prstGeom prst="rect">
-            <a:avLst/>
-          </a:prstGeom>
-          <a:noFill/>
-          <a:ln/>
-        </p:spPr>
-        <p:txBody>
-          <a:bodyPr wrap="square" lIns="0" tIns="0" rIns="0" bIns="0" rtlCol="0" anchor="ctr"/>
-          <a:lstStyle/>
-          <a:p>
-            <a:pPr algn="l" indent="0" marL="0">
-              <a:buNone/>
-            </a:pPr>
-            <a:r>
-              <a:rPr lang="en-US" sz="900" dirty="0">
-                <a:solidFill>
-                  <a:srgbClr val="5D5D72"/>
-                </a:solidFill>
-                <a:latin typeface="Calibri" pitchFamily="34" charset="0"/>
-                <a:ea typeface="Calibri" pitchFamily="34" charset="-122"/>
-                <a:cs typeface="Calibri" pitchFamily="34" charset="-120"/>
-              </a:rPr>
-              <a:t>Usman Akram  •  COMSATS University Islamabad</a:t>
-            </a:r>
-            <a:endParaRPr lang="en-US" sz="900" dirty="0"/>
-          </a:p>
-        </p:txBody>
-      </p:sp>
-      <p:sp>
-        <p:nvSpPr>
-          <p:cNvPr id="8" name="Text 6"/>
-          <p:cNvSpPr txBox="1"/>
-          <p:nvPr/>
-        </p:nvSpPr>
-        <p:spPr>
-          <a:xfrm>
-            <a:off x="11155680" y="6446520"/>
-            <a:ext cx="457200" cy="292608"/>
-          </a:xfrm>
-          <a:prstGeom prst="rect">
-            <a:avLst/>
-          </a:prstGeom>
-          <a:noFill/>
-          <a:ln/>
-        </p:spPr>
-        <p:txBody>
-          <a:bodyPr wrap="square" lIns="0" tIns="0" rIns="0" bIns="0" rtlCol="0" anchor="ctr"/>
-          <a:lstStyle/>
-          <a:p>
-            <a:pPr algn="r" indent="0" marL="0">
-              <a:buNone/>
-            </a:pPr>
-            <a:r>
-              <a:rPr lang="en-US" sz="900" dirty="0">
-                <a:solidFill>
-                  <a:srgbClr val="5D5D72"/>
-                </a:solidFill>
-                <a:latin typeface="Calibri" pitchFamily="34" charset="0"/>
-                <a:ea typeface="Calibri" pitchFamily="34" charset="-122"/>
-                <a:cs typeface="Calibri" pitchFamily="34" charset="-120"/>
-              </a:rPr>
-              <a:t>20</a:t>
-            </a:r>
-            <a:endParaRPr lang="en-US" sz="900" dirty="0"/>
+          <p:cNvPr id="9" name="cuinotes-footer-mark"/>
+          <p:cNvSpPr txBox="1"/>
+          <p:nvPr/>
+        </p:nvSpPr>
+        <p:spPr>
+          <a:xfrm>
+            <a:off x="9951720" y="6455664"/>
+            <a:ext cx="2011680" cy="292608"/>
+          </a:xfrm>
+          <a:prstGeom prst="rect">
+            <a:avLst/>
+          </a:prstGeom>
+          <a:noFill/>
+        </p:spPr>
+        <p:txBody>
+          <a:bodyPr wrap="none" lIns="0" rIns="0" tIns="0" bIns="0">
+            <a:spAutoFit/>
+          </a:bodyPr>
+          <a:lstStyle/>
+          <a:p>
+            <a:pPr algn="r"/>
+            <a:r>
+              <a:rPr sz="1000">
+                <a:solidFill>
+                  <a:srgbClr val="8A939B"/>
+                </a:solidFill>
+                <a:hlinkClick r:id="rId3"/>
+              </a:rPr>
+              <a:t>cuinotes.com</a:t>
+            </a:r>
+            <a:r>
+              <a:rPr sz="1000">
+                <a:solidFill>
+                  <a:srgbClr val="8A939B"/>
+                </a:solidFill>
+              </a:rPr>
+              <a:t>  ·  20</a:t>
+            </a:r>
           </a:p>
         </p:txBody>
       </p:sp>
@@ -8707,6 +8336,10 @@
           </a:solidFill>
           <a:ln/>
         </p:spPr>
+        <p:txBody>
+          <a:bodyPr/>
+          <a:p/>
+        </p:txBody>
       </p:sp>
       <p:sp>
         <p:nvSpPr>
@@ -9000,79 +8633,44 @@
       </p:sp>
       <p:sp>
         <p:nvSpPr>
-          <p:cNvPr id="7" name="Text 5"/>
-          <p:cNvSpPr txBox="1"/>
-          <p:nvPr/>
-        </p:nvSpPr>
-        <p:spPr>
-          <a:xfrm>
-            <a:off x="640080" y="6446520"/>
-            <a:ext cx="8686800" cy="292608"/>
-          </a:xfrm>
-          <a:prstGeom prst="rect">
-            <a:avLst/>
-          </a:prstGeom>
-          <a:noFill/>
-          <a:ln/>
-        </p:spPr>
-        <p:txBody>
-          <a:bodyPr wrap="square" lIns="0" tIns="0" rIns="0" bIns="0" rtlCol="0" anchor="ctr"/>
-          <a:lstStyle/>
-          <a:p>
-            <a:pPr algn="l" indent="0" marL="0">
-              <a:buNone/>
-            </a:pPr>
-            <a:r>
-              <a:rPr lang="en-US" sz="900" dirty="0">
-                <a:solidFill>
-                  <a:srgbClr val="5D5D72"/>
-                </a:solidFill>
-                <a:latin typeface="Calibri" pitchFamily="34" charset="0"/>
-                <a:ea typeface="Calibri" pitchFamily="34" charset="-122"/>
-                <a:cs typeface="Calibri" pitchFamily="34" charset="-120"/>
-              </a:rPr>
-              <a:t>Usman Akram  •  COMSATS University Islamabad</a:t>
-            </a:r>
-            <a:endParaRPr lang="en-US" sz="900" dirty="0"/>
-          </a:p>
-        </p:txBody>
-      </p:sp>
-      <p:sp>
-        <p:nvSpPr>
-          <p:cNvPr id="8" name="Text 6"/>
-          <p:cNvSpPr txBox="1"/>
-          <p:nvPr/>
-        </p:nvSpPr>
-        <p:spPr>
-          <a:xfrm>
-            <a:off x="11155680" y="6446520"/>
-            <a:ext cx="457200" cy="292608"/>
-          </a:xfrm>
-          <a:prstGeom prst="rect">
-            <a:avLst/>
-          </a:prstGeom>
-          <a:noFill/>
-          <a:ln/>
-        </p:spPr>
-        <p:txBody>
-          <a:bodyPr wrap="square" lIns="0" tIns="0" rIns="0" bIns="0" rtlCol="0" anchor="ctr"/>
-          <a:lstStyle/>
-          <a:p>
-            <a:pPr algn="r" indent="0" marL="0">
-              <a:buNone/>
-            </a:pPr>
-            <a:r>
-              <a:rPr lang="en-US" sz="900" dirty="0">
-                <a:solidFill>
-                  <a:srgbClr val="5D5D72"/>
-                </a:solidFill>
-                <a:latin typeface="Calibri" pitchFamily="34" charset="0"/>
-                <a:ea typeface="Calibri" pitchFamily="34" charset="-122"/>
-                <a:cs typeface="Calibri" pitchFamily="34" charset="-120"/>
-              </a:rPr>
-              <a:t>21</a:t>
-            </a:r>
-            <a:endParaRPr lang="en-US" sz="900" dirty="0"/>
+          <p:cNvPr id="9" name="cuinotes-footer-mark"/>
+          <p:cNvSpPr txBox="1"/>
+          <p:nvPr/>
+        </p:nvSpPr>
+        <p:spPr>
+          <a:xfrm>
+            <a:off x="9951720" y="6455664"/>
+            <a:ext cx="2011680" cy="292608"/>
+          </a:xfrm>
+          <a:prstGeom prst="rect">
+            <a:avLst/>
+          </a:prstGeom>
+          <a:noFill/>
+        </p:spPr>
+        <p:txBody>
+          <a:bodyPr wrap="none" lIns="0" rIns="0" tIns="0" bIns="0">
+            <a:spAutoFit/>
+          </a:bodyPr>
+          <a:lstStyle/>
+          <a:p>
+            <a:pPr algn="r"/>
+            <a:r>
+              <a:rPr sz="1000">
+                <a:solidFill>
+                  <a:srgbClr val="8A939B"/>
+                </a:solidFill>
+                <a:hlinkClick r:id="rId3"/>
+              </a:rPr>
+              <a:t>cuinotes.com</a:t>
+            </a:r>
+            <a:r>
+              <a:rPr sz="1000">
+                <a:solidFill>
+                  <a:srgbClr val="8A939B"/>
+                </a:solidFill>
+              </a:rPr>
+              <a:t>  ·  21</a:t>
+            </a:r>
           </a:p>
         </p:txBody>
       </p:sp>
@@ -9207,6 +8805,10 @@
           </a:solidFill>
           <a:ln/>
         </p:spPr>
+        <p:txBody>
+          <a:bodyPr/>
+          <a:p/>
+        </p:txBody>
       </p:sp>
       <p:sp>
         <p:nvSpPr>
@@ -9472,6 +9074,10 @@
             </a:outerShdw>
           </a:effectLst>
         </p:spPr>
+        <p:txBody>
+          <a:bodyPr/>
+          <a:p/>
+        </p:txBody>
       </p:sp>
       <p:pic>
         <p:nvPicPr>
@@ -9499,79 +9105,44 @@
       </p:pic>
       <p:sp>
         <p:nvSpPr>
-          <p:cNvPr id="8" name="Text 5"/>
-          <p:cNvSpPr txBox="1"/>
-          <p:nvPr/>
-        </p:nvSpPr>
-        <p:spPr>
-          <a:xfrm>
-            <a:off x="640080" y="6446520"/>
-            <a:ext cx="8686800" cy="292608"/>
-          </a:xfrm>
-          <a:prstGeom prst="rect">
-            <a:avLst/>
-          </a:prstGeom>
-          <a:noFill/>
-          <a:ln/>
-        </p:spPr>
-        <p:txBody>
-          <a:bodyPr wrap="square" lIns="0" tIns="0" rIns="0" bIns="0" rtlCol="0" anchor="ctr"/>
-          <a:lstStyle/>
-          <a:p>
-            <a:pPr algn="l" indent="0" marL="0">
-              <a:buNone/>
-            </a:pPr>
-            <a:r>
-              <a:rPr lang="en-US" sz="900" dirty="0">
-                <a:solidFill>
-                  <a:srgbClr val="5D5D72"/>
-                </a:solidFill>
-                <a:latin typeface="Calibri" pitchFamily="34" charset="0"/>
-                <a:ea typeface="Calibri" pitchFamily="34" charset="-122"/>
-                <a:cs typeface="Calibri" pitchFamily="34" charset="-120"/>
-              </a:rPr>
-              <a:t>Usman Akram  •  COMSATS University Islamabad</a:t>
-            </a:r>
-            <a:endParaRPr lang="en-US" sz="900" dirty="0"/>
-          </a:p>
-        </p:txBody>
-      </p:sp>
-      <p:sp>
-        <p:nvSpPr>
-          <p:cNvPr id="9" name="Text 6"/>
-          <p:cNvSpPr txBox="1"/>
-          <p:nvPr/>
-        </p:nvSpPr>
-        <p:spPr>
-          <a:xfrm>
-            <a:off x="11155680" y="6446520"/>
-            <a:ext cx="457200" cy="292608"/>
-          </a:xfrm>
-          <a:prstGeom prst="rect">
-            <a:avLst/>
-          </a:prstGeom>
-          <a:noFill/>
-          <a:ln/>
-        </p:spPr>
-        <p:txBody>
-          <a:bodyPr wrap="square" lIns="0" tIns="0" rIns="0" bIns="0" rtlCol="0" anchor="ctr"/>
-          <a:lstStyle/>
-          <a:p>
-            <a:pPr algn="r" indent="0" marL="0">
-              <a:buNone/>
-            </a:pPr>
-            <a:r>
-              <a:rPr lang="en-US" sz="900" dirty="0">
-                <a:solidFill>
-                  <a:srgbClr val="5D5D72"/>
-                </a:solidFill>
-                <a:latin typeface="Calibri" pitchFamily="34" charset="0"/>
-                <a:ea typeface="Calibri" pitchFamily="34" charset="-122"/>
-                <a:cs typeface="Calibri" pitchFamily="34" charset="-120"/>
-              </a:rPr>
-              <a:t>22</a:t>
-            </a:r>
-            <a:endParaRPr lang="en-US" sz="900" dirty="0"/>
+          <p:cNvPr id="10" name="cuinotes-footer-mark"/>
+          <p:cNvSpPr txBox="1"/>
+          <p:nvPr/>
+        </p:nvSpPr>
+        <p:spPr>
+          <a:xfrm>
+            <a:off x="9951720" y="6455664"/>
+            <a:ext cx="2011680" cy="292608"/>
+          </a:xfrm>
+          <a:prstGeom prst="rect">
+            <a:avLst/>
+          </a:prstGeom>
+          <a:noFill/>
+        </p:spPr>
+        <p:txBody>
+          <a:bodyPr wrap="none" lIns="0" rIns="0" tIns="0" bIns="0">
+            <a:spAutoFit/>
+          </a:bodyPr>
+          <a:lstStyle/>
+          <a:p>
+            <a:pPr algn="r"/>
+            <a:r>
+              <a:rPr sz="1000">
+                <a:solidFill>
+                  <a:srgbClr val="8A939B"/>
+                </a:solidFill>
+                <a:hlinkClick r:id="rId4"/>
+              </a:rPr>
+              <a:t>cuinotes.com</a:t>
+            </a:r>
+            <a:r>
+              <a:rPr sz="1000">
+                <a:solidFill>
+                  <a:srgbClr val="8A939B"/>
+                </a:solidFill>
+              </a:rPr>
+              <a:t>  ·  22</a:t>
+            </a:r>
           </a:p>
         </p:txBody>
       </p:sp>
@@ -9704,6 +9275,10 @@
           </a:solidFill>
           <a:ln/>
         </p:spPr>
+        <p:txBody>
+          <a:bodyPr/>
+          <a:p/>
+        </p:txBody>
       </p:sp>
       <p:sp>
         <p:nvSpPr>
@@ -9802,6 +9377,10 @@
           </a:solidFill>
           <a:ln/>
         </p:spPr>
+        <p:txBody>
+          <a:bodyPr/>
+          <a:p/>
+        </p:txBody>
       </p:sp>
       <p:sp>
         <p:nvSpPr>
@@ -9900,6 +9479,10 @@
           </a:solidFill>
           <a:ln/>
         </p:spPr>
+        <p:txBody>
+          <a:bodyPr/>
+          <a:p/>
+        </p:txBody>
       </p:sp>
       <p:sp>
         <p:nvSpPr>
@@ -9981,79 +9564,44 @@
       </p:sp>
       <p:sp>
         <p:nvSpPr>
-          <p:cNvPr id="13" name="Text 11"/>
-          <p:cNvSpPr txBox="1"/>
-          <p:nvPr/>
-        </p:nvSpPr>
-        <p:spPr>
-          <a:xfrm>
-            <a:off x="640080" y="6446520"/>
-            <a:ext cx="8686800" cy="292608"/>
-          </a:xfrm>
-          <a:prstGeom prst="rect">
-            <a:avLst/>
-          </a:prstGeom>
-          <a:noFill/>
-          <a:ln/>
-        </p:spPr>
-        <p:txBody>
-          <a:bodyPr wrap="square" lIns="0" tIns="0" rIns="0" bIns="0" rtlCol="0" anchor="ctr"/>
-          <a:lstStyle/>
-          <a:p>
-            <a:pPr algn="l" indent="0" marL="0">
-              <a:buNone/>
-            </a:pPr>
-            <a:r>
-              <a:rPr lang="en-US" sz="900" dirty="0">
-                <a:solidFill>
-                  <a:srgbClr val="5D5D72"/>
-                </a:solidFill>
-                <a:latin typeface="Calibri" pitchFamily="34" charset="0"/>
-                <a:ea typeface="Calibri" pitchFamily="34" charset="-122"/>
-                <a:cs typeface="Calibri" pitchFamily="34" charset="-120"/>
-              </a:rPr>
-              <a:t>Usman Akram  •  COMSATS University Islamabad</a:t>
-            </a:r>
-            <a:endParaRPr lang="en-US" sz="900" dirty="0"/>
-          </a:p>
-        </p:txBody>
-      </p:sp>
-      <p:sp>
-        <p:nvSpPr>
-          <p:cNvPr id="14" name="Text 12"/>
-          <p:cNvSpPr txBox="1"/>
-          <p:nvPr/>
-        </p:nvSpPr>
-        <p:spPr>
-          <a:xfrm>
-            <a:off x="11155680" y="6446520"/>
-            <a:ext cx="457200" cy="292608"/>
-          </a:xfrm>
-          <a:prstGeom prst="rect">
-            <a:avLst/>
-          </a:prstGeom>
-          <a:noFill/>
-          <a:ln/>
-        </p:spPr>
-        <p:txBody>
-          <a:bodyPr wrap="square" lIns="0" tIns="0" rIns="0" bIns="0" rtlCol="0" anchor="ctr"/>
-          <a:lstStyle/>
-          <a:p>
-            <a:pPr algn="r" indent="0" marL="0">
-              <a:buNone/>
-            </a:pPr>
-            <a:r>
-              <a:rPr lang="en-US" sz="900" dirty="0">
-                <a:solidFill>
-                  <a:srgbClr val="5D5D72"/>
-                </a:solidFill>
-                <a:latin typeface="Calibri" pitchFamily="34" charset="0"/>
-                <a:ea typeface="Calibri" pitchFamily="34" charset="-122"/>
-                <a:cs typeface="Calibri" pitchFamily="34" charset="-120"/>
-              </a:rPr>
-              <a:t>23</a:t>
-            </a:r>
-            <a:endParaRPr lang="en-US" sz="900" dirty="0"/>
+          <p:cNvPr id="15" name="cuinotes-footer-mark"/>
+          <p:cNvSpPr txBox="1"/>
+          <p:nvPr/>
+        </p:nvSpPr>
+        <p:spPr>
+          <a:xfrm>
+            <a:off x="9951720" y="6455664"/>
+            <a:ext cx="2011680" cy="292608"/>
+          </a:xfrm>
+          <a:prstGeom prst="rect">
+            <a:avLst/>
+          </a:prstGeom>
+          <a:noFill/>
+        </p:spPr>
+        <p:txBody>
+          <a:bodyPr wrap="none" lIns="0" rIns="0" tIns="0" bIns="0">
+            <a:spAutoFit/>
+          </a:bodyPr>
+          <a:lstStyle/>
+          <a:p>
+            <a:pPr algn="r"/>
+            <a:r>
+              <a:rPr sz="1000">
+                <a:solidFill>
+                  <a:srgbClr val="8A939B"/>
+                </a:solidFill>
+                <a:hlinkClick r:id="rId3"/>
+              </a:rPr>
+              <a:t>cuinotes.com</a:t>
+            </a:r>
+            <a:r>
+              <a:rPr sz="1000">
+                <a:solidFill>
+                  <a:srgbClr val="8A939B"/>
+                </a:solidFill>
+              </a:rPr>
+              <a:t>  ·  23</a:t>
+            </a:r>
           </a:p>
         </p:txBody>
       </p:sp>
@@ -10188,6 +9736,10 @@
           </a:solidFill>
           <a:ln/>
         </p:spPr>
+        <p:txBody>
+          <a:bodyPr/>
+          <a:p/>
+        </p:txBody>
       </p:sp>
       <p:sp>
         <p:nvSpPr>
@@ -10411,79 +9963,44 @@
       </p:sp>
       <p:sp>
         <p:nvSpPr>
-          <p:cNvPr id="6" name="Text 4"/>
-          <p:cNvSpPr txBox="1"/>
-          <p:nvPr/>
-        </p:nvSpPr>
-        <p:spPr>
-          <a:xfrm>
-            <a:off x="640080" y="6446520"/>
-            <a:ext cx="8686800" cy="292608"/>
-          </a:xfrm>
-          <a:prstGeom prst="rect">
-            <a:avLst/>
-          </a:prstGeom>
-          <a:noFill/>
-          <a:ln/>
-        </p:spPr>
-        <p:txBody>
-          <a:bodyPr wrap="square" lIns="0" tIns="0" rIns="0" bIns="0" rtlCol="0" anchor="ctr"/>
-          <a:lstStyle/>
-          <a:p>
-            <a:pPr algn="l" indent="0" marL="0">
-              <a:buNone/>
-            </a:pPr>
-            <a:r>
-              <a:rPr lang="en-US" sz="900" dirty="0">
-                <a:solidFill>
-                  <a:srgbClr val="5D5D72"/>
-                </a:solidFill>
-                <a:latin typeface="Calibri" pitchFamily="34" charset="0"/>
-                <a:ea typeface="Calibri" pitchFamily="34" charset="-122"/>
-                <a:cs typeface="Calibri" pitchFamily="34" charset="-120"/>
-              </a:rPr>
-              <a:t>Usman Akram  •  COMSATS University Islamabad</a:t>
-            </a:r>
-            <a:endParaRPr lang="en-US" sz="900" dirty="0"/>
-          </a:p>
-        </p:txBody>
-      </p:sp>
-      <p:sp>
-        <p:nvSpPr>
-          <p:cNvPr id="7" name="Text 5"/>
-          <p:cNvSpPr txBox="1"/>
-          <p:nvPr/>
-        </p:nvSpPr>
-        <p:spPr>
-          <a:xfrm>
-            <a:off x="11155680" y="6446520"/>
-            <a:ext cx="457200" cy="292608"/>
-          </a:xfrm>
-          <a:prstGeom prst="rect">
-            <a:avLst/>
-          </a:prstGeom>
-          <a:noFill/>
-          <a:ln/>
-        </p:spPr>
-        <p:txBody>
-          <a:bodyPr wrap="square" lIns="0" tIns="0" rIns="0" bIns="0" rtlCol="0" anchor="ctr"/>
-          <a:lstStyle/>
-          <a:p>
-            <a:pPr algn="r" indent="0" marL="0">
-              <a:buNone/>
-            </a:pPr>
-            <a:r>
-              <a:rPr lang="en-US" sz="900" dirty="0">
-                <a:solidFill>
-                  <a:srgbClr val="5D5D72"/>
-                </a:solidFill>
-                <a:latin typeface="Calibri" pitchFamily="34" charset="0"/>
-                <a:ea typeface="Calibri" pitchFamily="34" charset="-122"/>
-                <a:cs typeface="Calibri" pitchFamily="34" charset="-120"/>
-              </a:rPr>
-              <a:t>24</a:t>
-            </a:r>
-            <a:endParaRPr lang="en-US" sz="900" dirty="0"/>
+          <p:cNvPr id="8" name="cuinotes-footer-mark"/>
+          <p:cNvSpPr txBox="1"/>
+          <p:nvPr/>
+        </p:nvSpPr>
+        <p:spPr>
+          <a:xfrm>
+            <a:off x="9951720" y="6455664"/>
+            <a:ext cx="2011680" cy="292608"/>
+          </a:xfrm>
+          <a:prstGeom prst="rect">
+            <a:avLst/>
+          </a:prstGeom>
+          <a:noFill/>
+        </p:spPr>
+        <p:txBody>
+          <a:bodyPr wrap="none" lIns="0" rIns="0" tIns="0" bIns="0">
+            <a:spAutoFit/>
+          </a:bodyPr>
+          <a:lstStyle/>
+          <a:p>
+            <a:pPr algn="r"/>
+            <a:r>
+              <a:rPr sz="1000">
+                <a:solidFill>
+                  <a:srgbClr val="8A939B"/>
+                </a:solidFill>
+                <a:hlinkClick r:id="rId3"/>
+              </a:rPr>
+              <a:t>cuinotes.com</a:t>
+            </a:r>
+            <a:r>
+              <a:rPr sz="1000">
+                <a:solidFill>
+                  <a:srgbClr val="8A939B"/>
+                </a:solidFill>
+              </a:rPr>
+              <a:t>  ·  24</a:t>
+            </a:r>
           </a:p>
         </p:txBody>
       </p:sp>
@@ -10618,6 +10135,10 @@
           </a:solidFill>
           <a:ln/>
         </p:spPr>
+        <p:txBody>
+          <a:bodyPr/>
+          <a:p/>
+        </p:txBody>
       </p:sp>
       <p:sp>
         <p:nvSpPr>
@@ -10871,79 +10392,44 @@
       </p:sp>
       <p:sp>
         <p:nvSpPr>
-          <p:cNvPr id="7" name="Text 5"/>
-          <p:cNvSpPr txBox="1"/>
-          <p:nvPr/>
-        </p:nvSpPr>
-        <p:spPr>
-          <a:xfrm>
-            <a:off x="640080" y="6446520"/>
-            <a:ext cx="8686800" cy="292608"/>
-          </a:xfrm>
-          <a:prstGeom prst="rect">
-            <a:avLst/>
-          </a:prstGeom>
-          <a:noFill/>
-          <a:ln/>
-        </p:spPr>
-        <p:txBody>
-          <a:bodyPr wrap="square" lIns="0" tIns="0" rIns="0" bIns="0" rtlCol="0" anchor="ctr"/>
-          <a:lstStyle/>
-          <a:p>
-            <a:pPr algn="l" indent="0" marL="0">
-              <a:buNone/>
-            </a:pPr>
-            <a:r>
-              <a:rPr lang="en-US" sz="900" dirty="0">
-                <a:solidFill>
-                  <a:srgbClr val="5D5D72"/>
-                </a:solidFill>
-                <a:latin typeface="Calibri" pitchFamily="34" charset="0"/>
-                <a:ea typeface="Calibri" pitchFamily="34" charset="-122"/>
-                <a:cs typeface="Calibri" pitchFamily="34" charset="-120"/>
-              </a:rPr>
-              <a:t>Usman Akram  •  COMSATS University Islamabad</a:t>
-            </a:r>
-            <a:endParaRPr lang="en-US" sz="900" dirty="0"/>
-          </a:p>
-        </p:txBody>
-      </p:sp>
-      <p:sp>
-        <p:nvSpPr>
-          <p:cNvPr id="8" name="Text 6"/>
-          <p:cNvSpPr txBox="1"/>
-          <p:nvPr/>
-        </p:nvSpPr>
-        <p:spPr>
-          <a:xfrm>
-            <a:off x="11155680" y="6446520"/>
-            <a:ext cx="457200" cy="292608"/>
-          </a:xfrm>
-          <a:prstGeom prst="rect">
-            <a:avLst/>
-          </a:prstGeom>
-          <a:noFill/>
-          <a:ln/>
-        </p:spPr>
-        <p:txBody>
-          <a:bodyPr wrap="square" lIns="0" tIns="0" rIns="0" bIns="0" rtlCol="0" anchor="ctr"/>
-          <a:lstStyle/>
-          <a:p>
-            <a:pPr algn="r" indent="0" marL="0">
-              <a:buNone/>
-            </a:pPr>
-            <a:r>
-              <a:rPr lang="en-US" sz="900" dirty="0">
-                <a:solidFill>
-                  <a:srgbClr val="5D5D72"/>
-                </a:solidFill>
-                <a:latin typeface="Calibri" pitchFamily="34" charset="0"/>
-                <a:ea typeface="Calibri" pitchFamily="34" charset="-122"/>
-                <a:cs typeface="Calibri" pitchFamily="34" charset="-120"/>
-              </a:rPr>
-              <a:t>25</a:t>
-            </a:r>
-            <a:endParaRPr lang="en-US" sz="900" dirty="0"/>
+          <p:cNvPr id="9" name="cuinotes-footer-mark"/>
+          <p:cNvSpPr txBox="1"/>
+          <p:nvPr/>
+        </p:nvSpPr>
+        <p:spPr>
+          <a:xfrm>
+            <a:off x="9951720" y="6455664"/>
+            <a:ext cx="2011680" cy="292608"/>
+          </a:xfrm>
+          <a:prstGeom prst="rect">
+            <a:avLst/>
+          </a:prstGeom>
+          <a:noFill/>
+        </p:spPr>
+        <p:txBody>
+          <a:bodyPr wrap="none" lIns="0" rIns="0" tIns="0" bIns="0">
+            <a:spAutoFit/>
+          </a:bodyPr>
+          <a:lstStyle/>
+          <a:p>
+            <a:pPr algn="r"/>
+            <a:r>
+              <a:rPr sz="1000">
+                <a:solidFill>
+                  <a:srgbClr val="8A939B"/>
+                </a:solidFill>
+                <a:hlinkClick r:id="rId3"/>
+              </a:rPr>
+              <a:t>cuinotes.com</a:t>
+            </a:r>
+            <a:r>
+              <a:rPr sz="1000">
+                <a:solidFill>
+                  <a:srgbClr val="8A939B"/>
+                </a:solidFill>
+              </a:rPr>
+              <a:t>  ·  25</a:t>
+            </a:r>
           </a:p>
         </p:txBody>
       </p:sp>
@@ -11076,6 +10562,10 @@
           </a:solidFill>
           <a:ln/>
         </p:spPr>
+        <p:txBody>
+          <a:bodyPr/>
+          <a:p/>
+        </p:txBody>
       </p:sp>
       <p:sp>
         <p:nvSpPr>
@@ -11174,6 +10664,10 @@
           </a:solidFill>
           <a:ln/>
         </p:spPr>
+        <p:txBody>
+          <a:bodyPr/>
+          <a:p/>
+        </p:txBody>
       </p:sp>
       <p:sp>
         <p:nvSpPr>
@@ -11272,6 +10766,10 @@
           </a:solidFill>
           <a:ln/>
         </p:spPr>
+        <p:txBody>
+          <a:bodyPr/>
+          <a:p/>
+        </p:txBody>
       </p:sp>
       <p:sp>
         <p:nvSpPr>
@@ -11370,6 +10868,10 @@
           </a:solidFill>
           <a:ln/>
         </p:spPr>
+        <p:txBody>
+          <a:bodyPr/>
+          <a:p/>
+        </p:txBody>
       </p:sp>
       <p:sp>
         <p:nvSpPr>
@@ -11468,6 +10970,10 @@
           </a:solidFill>
           <a:ln/>
         </p:spPr>
+        <p:txBody>
+          <a:bodyPr/>
+          <a:p/>
+        </p:txBody>
       </p:sp>
       <p:sp>
         <p:nvSpPr>
@@ -11566,6 +11072,10 @@
           </a:solidFill>
           <a:ln/>
         </p:spPr>
+        <p:txBody>
+          <a:bodyPr/>
+          <a:p/>
+        </p:txBody>
       </p:sp>
       <p:sp>
         <p:nvSpPr>
@@ -11647,79 +11157,44 @@
       </p:sp>
       <p:sp>
         <p:nvSpPr>
-          <p:cNvPr id="22" name="Text 20"/>
-          <p:cNvSpPr txBox="1"/>
-          <p:nvPr/>
-        </p:nvSpPr>
-        <p:spPr>
-          <a:xfrm>
-            <a:off x="640080" y="6446520"/>
-            <a:ext cx="8686800" cy="292608"/>
-          </a:xfrm>
-          <a:prstGeom prst="rect">
-            <a:avLst/>
-          </a:prstGeom>
-          <a:noFill/>
-          <a:ln/>
-        </p:spPr>
-        <p:txBody>
-          <a:bodyPr wrap="square" lIns="0" tIns="0" rIns="0" bIns="0" rtlCol="0" anchor="ctr"/>
-          <a:lstStyle/>
-          <a:p>
-            <a:pPr algn="l" indent="0" marL="0">
-              <a:buNone/>
-            </a:pPr>
-            <a:r>
-              <a:rPr lang="en-US" sz="900" dirty="0">
-                <a:solidFill>
-                  <a:srgbClr val="9AA3D8"/>
-                </a:solidFill>
-                <a:latin typeface="Calibri" pitchFamily="34" charset="0"/>
-                <a:ea typeface="Calibri" pitchFamily="34" charset="-122"/>
-                <a:cs typeface="Calibri" pitchFamily="34" charset="-120"/>
-              </a:rPr>
-              <a:t>Usman Akram  •  COMSATS University Islamabad</a:t>
-            </a:r>
-            <a:endParaRPr lang="en-US" sz="900" dirty="0"/>
-          </a:p>
-        </p:txBody>
-      </p:sp>
-      <p:sp>
-        <p:nvSpPr>
-          <p:cNvPr id="23" name="Text 21"/>
-          <p:cNvSpPr txBox="1"/>
-          <p:nvPr/>
-        </p:nvSpPr>
-        <p:spPr>
-          <a:xfrm>
-            <a:off x="11155680" y="6446520"/>
-            <a:ext cx="457200" cy="292608"/>
-          </a:xfrm>
-          <a:prstGeom prst="rect">
-            <a:avLst/>
-          </a:prstGeom>
-          <a:noFill/>
-          <a:ln/>
-        </p:spPr>
-        <p:txBody>
-          <a:bodyPr wrap="square" lIns="0" tIns="0" rIns="0" bIns="0" rtlCol="0" anchor="ctr"/>
-          <a:lstStyle/>
-          <a:p>
-            <a:pPr algn="r" indent="0" marL="0">
-              <a:buNone/>
-            </a:pPr>
-            <a:r>
-              <a:rPr lang="en-US" sz="900" dirty="0">
-                <a:solidFill>
-                  <a:srgbClr val="9AA3D8"/>
-                </a:solidFill>
-                <a:latin typeface="Calibri" pitchFamily="34" charset="0"/>
-                <a:ea typeface="Calibri" pitchFamily="34" charset="-122"/>
-                <a:cs typeface="Calibri" pitchFamily="34" charset="-120"/>
-              </a:rPr>
-              <a:t>26</a:t>
-            </a:r>
-            <a:endParaRPr lang="en-US" sz="900" dirty="0"/>
+          <p:cNvPr id="24" name="cuinotes-footer-mark"/>
+          <p:cNvSpPr txBox="1"/>
+          <p:nvPr/>
+        </p:nvSpPr>
+        <p:spPr>
+          <a:xfrm>
+            <a:off x="9951720" y="6455664"/>
+            <a:ext cx="2011680" cy="292608"/>
+          </a:xfrm>
+          <a:prstGeom prst="rect">
+            <a:avLst/>
+          </a:prstGeom>
+          <a:noFill/>
+        </p:spPr>
+        <p:txBody>
+          <a:bodyPr wrap="none" lIns="0" rIns="0" tIns="0" bIns="0">
+            <a:spAutoFit/>
+          </a:bodyPr>
+          <a:lstStyle/>
+          <a:p>
+            <a:pPr algn="r"/>
+            <a:r>
+              <a:rPr sz="1000">
+                <a:solidFill>
+                  <a:srgbClr val="8A939B"/>
+                </a:solidFill>
+                <a:hlinkClick r:id="rId3"/>
+              </a:rPr>
+              <a:t>cuinotes.com</a:t>
+            </a:r>
+            <a:r>
+              <a:rPr sz="1000">
+                <a:solidFill>
+                  <a:srgbClr val="8A939B"/>
+                </a:solidFill>
+              </a:rPr>
+              <a:t>  ·  26</a:t>
+            </a:r>
           </a:p>
         </p:txBody>
       </p:sp>
@@ -11852,6 +11327,10 @@
           </a:solidFill>
           <a:ln/>
         </p:spPr>
+        <p:txBody>
+          <a:bodyPr/>
+          <a:p/>
+        </p:txBody>
       </p:sp>
       <p:sp>
         <p:nvSpPr>
@@ -11950,6 +11429,10 @@
           </a:solidFill>
           <a:ln/>
         </p:spPr>
+        <p:txBody>
+          <a:bodyPr/>
+          <a:p/>
+        </p:txBody>
       </p:sp>
       <p:sp>
         <p:nvSpPr>
@@ -12048,6 +11531,10 @@
           </a:solidFill>
           <a:ln/>
         </p:spPr>
+        <p:txBody>
+          <a:bodyPr/>
+          <a:p/>
+        </p:txBody>
       </p:sp>
       <p:sp>
         <p:nvSpPr>
@@ -12146,6 +11633,10 @@
           </a:solidFill>
           <a:ln/>
         </p:spPr>
+        <p:txBody>
+          <a:bodyPr/>
+          <a:p/>
+        </p:txBody>
       </p:sp>
       <p:sp>
         <p:nvSpPr>
@@ -12227,79 +11718,44 @@
       </p:sp>
       <p:sp>
         <p:nvSpPr>
-          <p:cNvPr id="16" name="Text 14"/>
-          <p:cNvSpPr txBox="1"/>
-          <p:nvPr/>
-        </p:nvSpPr>
-        <p:spPr>
-          <a:xfrm>
-            <a:off x="640080" y="6446520"/>
-            <a:ext cx="8686800" cy="292608"/>
-          </a:xfrm>
-          <a:prstGeom prst="rect">
-            <a:avLst/>
-          </a:prstGeom>
-          <a:noFill/>
-          <a:ln/>
-        </p:spPr>
-        <p:txBody>
-          <a:bodyPr wrap="square" lIns="0" tIns="0" rIns="0" bIns="0" rtlCol="0" anchor="ctr"/>
-          <a:lstStyle/>
-          <a:p>
-            <a:pPr algn="l" indent="0" marL="0">
-              <a:buNone/>
-            </a:pPr>
-            <a:r>
-              <a:rPr lang="en-US" sz="900" dirty="0">
-                <a:solidFill>
-                  <a:srgbClr val="5D5D72"/>
-                </a:solidFill>
-                <a:latin typeface="Calibri" pitchFamily="34" charset="0"/>
-                <a:ea typeface="Calibri" pitchFamily="34" charset="-122"/>
-                <a:cs typeface="Calibri" pitchFamily="34" charset="-120"/>
-              </a:rPr>
-              <a:t>Usman Akram  •  COMSATS University Islamabad</a:t>
-            </a:r>
-            <a:endParaRPr lang="en-US" sz="900" dirty="0"/>
-          </a:p>
-        </p:txBody>
-      </p:sp>
-      <p:sp>
-        <p:nvSpPr>
-          <p:cNvPr id="17" name="Text 15"/>
-          <p:cNvSpPr txBox="1"/>
-          <p:nvPr/>
-        </p:nvSpPr>
-        <p:spPr>
-          <a:xfrm>
-            <a:off x="11155680" y="6446520"/>
-            <a:ext cx="457200" cy="292608"/>
-          </a:xfrm>
-          <a:prstGeom prst="rect">
-            <a:avLst/>
-          </a:prstGeom>
-          <a:noFill/>
-          <a:ln/>
-        </p:spPr>
-        <p:txBody>
-          <a:bodyPr wrap="square" lIns="0" tIns="0" rIns="0" bIns="0" rtlCol="0" anchor="ctr"/>
-          <a:lstStyle/>
-          <a:p>
-            <a:pPr algn="r" indent="0" marL="0">
-              <a:buNone/>
-            </a:pPr>
-            <a:r>
-              <a:rPr lang="en-US" sz="900" dirty="0">
-                <a:solidFill>
-                  <a:srgbClr val="5D5D72"/>
-                </a:solidFill>
-                <a:latin typeface="Calibri" pitchFamily="34" charset="0"/>
-                <a:ea typeface="Calibri" pitchFamily="34" charset="-122"/>
-                <a:cs typeface="Calibri" pitchFamily="34" charset="-120"/>
-              </a:rPr>
-              <a:t>3</a:t>
-            </a:r>
-            <a:endParaRPr lang="en-US" sz="900" dirty="0"/>
+          <p:cNvPr id="18" name="cuinotes-footer-mark"/>
+          <p:cNvSpPr txBox="1"/>
+          <p:nvPr/>
+        </p:nvSpPr>
+        <p:spPr>
+          <a:xfrm>
+            <a:off x="9951720" y="6455664"/>
+            <a:ext cx="2011680" cy="292608"/>
+          </a:xfrm>
+          <a:prstGeom prst="rect">
+            <a:avLst/>
+          </a:prstGeom>
+          <a:noFill/>
+        </p:spPr>
+        <p:txBody>
+          <a:bodyPr wrap="none" lIns="0" rIns="0" tIns="0" bIns="0">
+            <a:spAutoFit/>
+          </a:bodyPr>
+          <a:lstStyle/>
+          <a:p>
+            <a:pPr algn="r"/>
+            <a:r>
+              <a:rPr sz="1000">
+                <a:solidFill>
+                  <a:srgbClr val="8A939B"/>
+                </a:solidFill>
+                <a:hlinkClick r:id="rId3"/>
+              </a:rPr>
+              <a:t>cuinotes.com</a:t>
+            </a:r>
+            <a:r>
+              <a:rPr sz="1000">
+                <a:solidFill>
+                  <a:srgbClr val="8A939B"/>
+                </a:solidFill>
+              </a:rPr>
+              <a:t>  ·  3</a:t>
+            </a:r>
           </a:p>
         </p:txBody>
       </p:sp>
@@ -12436,6 +11892,10 @@
             <a:tailEnd type="triangle"/>
           </a:ln>
         </p:spPr>
+        <p:txBody>
+          <a:bodyPr/>
+          <a:p/>
+        </p:txBody>
       </p:sp>
       <p:sp>
         <p:nvSpPr>
@@ -12460,6 +11920,10 @@
             <a:tailEnd type="triangle"/>
           </a:ln>
         </p:spPr>
+        <p:txBody>
+          <a:bodyPr/>
+          <a:p/>
+        </p:txBody>
       </p:sp>
       <p:sp>
         <p:nvSpPr>
@@ -12484,6 +11948,10 @@
             <a:tailEnd type="triangle"/>
           </a:ln>
         </p:spPr>
+        <p:txBody>
+          <a:bodyPr/>
+          <a:p/>
+        </p:txBody>
       </p:sp>
       <p:sp>
         <p:nvSpPr>
@@ -12508,6 +11976,10 @@
             <a:tailEnd type="triangle"/>
           </a:ln>
         </p:spPr>
+        <p:txBody>
+          <a:bodyPr/>
+          <a:p/>
+        </p:txBody>
       </p:sp>
       <p:sp>
         <p:nvSpPr>
@@ -12532,6 +12004,10 @@
             <a:tailEnd type="triangle"/>
           </a:ln>
         </p:spPr>
+        <p:txBody>
+          <a:bodyPr/>
+          <a:p/>
+        </p:txBody>
       </p:sp>
       <p:sp>
         <p:nvSpPr>
@@ -12556,6 +12032,10 @@
             <a:tailEnd type="triangle"/>
           </a:ln>
         </p:spPr>
+        <p:txBody>
+          <a:bodyPr/>
+          <a:p/>
+        </p:txBody>
       </p:sp>
       <p:sp>
         <p:nvSpPr>
@@ -12576,6 +12056,10 @@
           </a:solidFill>
           <a:ln/>
         </p:spPr>
+        <p:txBody>
+          <a:bodyPr/>
+          <a:p/>
+        </p:txBody>
       </p:sp>
       <p:sp>
         <p:nvSpPr>
@@ -12638,6 +12122,10 @@
           </a:solidFill>
           <a:ln/>
         </p:spPr>
+        <p:txBody>
+          <a:bodyPr/>
+          <a:p/>
+        </p:txBody>
       </p:sp>
       <p:sp>
         <p:nvSpPr>
@@ -12700,6 +12188,10 @@
           </a:solidFill>
           <a:ln/>
         </p:spPr>
+        <p:txBody>
+          <a:bodyPr/>
+          <a:p/>
+        </p:txBody>
       </p:sp>
       <p:sp>
         <p:nvSpPr>
@@ -12762,6 +12254,10 @@
           </a:solidFill>
           <a:ln/>
         </p:spPr>
+        <p:txBody>
+          <a:bodyPr/>
+          <a:p/>
+        </p:txBody>
       </p:sp>
       <p:sp>
         <p:nvSpPr>
@@ -12824,6 +12320,10 @@
           </a:solidFill>
           <a:ln/>
         </p:spPr>
+        <p:txBody>
+          <a:bodyPr/>
+          <a:p/>
+        </p:txBody>
       </p:sp>
       <p:sp>
         <p:nvSpPr>
@@ -12886,6 +12386,10 @@
           </a:solidFill>
           <a:ln/>
         </p:spPr>
+        <p:txBody>
+          <a:bodyPr/>
+          <a:p/>
+        </p:txBody>
       </p:sp>
       <p:sp>
         <p:nvSpPr>
@@ -12948,6 +12452,10 @@
           </a:solidFill>
           <a:ln/>
         </p:spPr>
+        <p:txBody>
+          <a:bodyPr/>
+          <a:p/>
+        </p:txBody>
       </p:sp>
       <p:sp>
         <p:nvSpPr>
@@ -13010,6 +12518,10 @@
           </a:solidFill>
           <a:ln/>
         </p:spPr>
+        <p:txBody>
+          <a:bodyPr/>
+          <a:p/>
+        </p:txBody>
       </p:sp>
       <p:sp>
         <p:nvSpPr>
@@ -13072,6 +12584,10 @@
           </a:solidFill>
           <a:ln/>
         </p:spPr>
+        <p:txBody>
+          <a:bodyPr/>
+          <a:p/>
+        </p:txBody>
       </p:sp>
       <p:sp>
         <p:nvSpPr>
@@ -13134,6 +12650,10 @@
           </a:solidFill>
           <a:ln/>
         </p:spPr>
+        <p:txBody>
+          <a:bodyPr/>
+          <a:p/>
+        </p:txBody>
       </p:sp>
       <p:sp>
         <p:nvSpPr>
@@ -13179,79 +12699,44 @@
       </p:sp>
       <p:sp>
         <p:nvSpPr>
-          <p:cNvPr id="30" name="Text 28"/>
-          <p:cNvSpPr txBox="1"/>
-          <p:nvPr/>
-        </p:nvSpPr>
-        <p:spPr>
-          <a:xfrm>
-            <a:off x="640080" y="6446520"/>
-            <a:ext cx="8686800" cy="292608"/>
-          </a:xfrm>
-          <a:prstGeom prst="rect">
-            <a:avLst/>
-          </a:prstGeom>
-          <a:noFill/>
-          <a:ln/>
-        </p:spPr>
-        <p:txBody>
-          <a:bodyPr wrap="square" lIns="0" tIns="0" rIns="0" bIns="0" rtlCol="0" anchor="ctr"/>
-          <a:lstStyle/>
-          <a:p>
-            <a:pPr algn="l" indent="0" marL="0">
-              <a:buNone/>
-            </a:pPr>
-            <a:r>
-              <a:rPr lang="en-US" sz="900" dirty="0">
-                <a:solidFill>
-                  <a:srgbClr val="5D5D72"/>
-                </a:solidFill>
-                <a:latin typeface="Calibri" pitchFamily="34" charset="0"/>
-                <a:ea typeface="Calibri" pitchFamily="34" charset="-122"/>
-                <a:cs typeface="Calibri" pitchFamily="34" charset="-120"/>
-              </a:rPr>
-              <a:t>Usman Akram  •  COMSATS University Islamabad</a:t>
-            </a:r>
-            <a:endParaRPr lang="en-US" sz="900" dirty="0"/>
-          </a:p>
-        </p:txBody>
-      </p:sp>
-      <p:sp>
-        <p:nvSpPr>
-          <p:cNvPr id="31" name="Text 29"/>
-          <p:cNvSpPr txBox="1"/>
-          <p:nvPr/>
-        </p:nvSpPr>
-        <p:spPr>
-          <a:xfrm>
-            <a:off x="11155680" y="6446520"/>
-            <a:ext cx="457200" cy="292608"/>
-          </a:xfrm>
-          <a:prstGeom prst="rect">
-            <a:avLst/>
-          </a:prstGeom>
-          <a:noFill/>
-          <a:ln/>
-        </p:spPr>
-        <p:txBody>
-          <a:bodyPr wrap="square" lIns="0" tIns="0" rIns="0" bIns="0" rtlCol="0" anchor="ctr"/>
-          <a:lstStyle/>
-          <a:p>
-            <a:pPr algn="r" indent="0" marL="0">
-              <a:buNone/>
-            </a:pPr>
-            <a:r>
-              <a:rPr lang="en-US" sz="900" dirty="0">
-                <a:solidFill>
-                  <a:srgbClr val="5D5D72"/>
-                </a:solidFill>
-                <a:latin typeface="Calibri" pitchFamily="34" charset="0"/>
-                <a:ea typeface="Calibri" pitchFamily="34" charset="-122"/>
-                <a:cs typeface="Calibri" pitchFamily="34" charset="-120"/>
-              </a:rPr>
-              <a:t>4</a:t>
-            </a:r>
-            <a:endParaRPr lang="en-US" sz="900" dirty="0"/>
+          <p:cNvPr id="32" name="cuinotes-footer-mark"/>
+          <p:cNvSpPr txBox="1"/>
+          <p:nvPr/>
+        </p:nvSpPr>
+        <p:spPr>
+          <a:xfrm>
+            <a:off x="9951720" y="6455664"/>
+            <a:ext cx="2011680" cy="292608"/>
+          </a:xfrm>
+          <a:prstGeom prst="rect">
+            <a:avLst/>
+          </a:prstGeom>
+          <a:noFill/>
+        </p:spPr>
+        <p:txBody>
+          <a:bodyPr wrap="none" lIns="0" rIns="0" tIns="0" bIns="0">
+            <a:spAutoFit/>
+          </a:bodyPr>
+          <a:lstStyle/>
+          <a:p>
+            <a:pPr algn="r"/>
+            <a:r>
+              <a:rPr sz="1000">
+                <a:solidFill>
+                  <a:srgbClr val="8A939B"/>
+                </a:solidFill>
+                <a:hlinkClick r:id="rId3"/>
+              </a:rPr>
+              <a:t>cuinotes.com</a:t>
+            </a:r>
+            <a:r>
+              <a:rPr sz="1000">
+                <a:solidFill>
+                  <a:srgbClr val="8A939B"/>
+                </a:solidFill>
+              </a:rPr>
+              <a:t>  ·  4</a:t>
+            </a:r>
           </a:p>
         </p:txBody>
       </p:sp>
@@ -13384,6 +12869,10 @@
           </a:solidFill>
           <a:ln/>
         </p:spPr>
+        <p:txBody>
+          <a:bodyPr/>
+          <a:p/>
+        </p:txBody>
       </p:sp>
       <p:sp>
         <p:nvSpPr>
@@ -13482,6 +12971,10 @@
           </a:solidFill>
           <a:ln/>
         </p:spPr>
+        <p:txBody>
+          <a:bodyPr/>
+          <a:p/>
+        </p:txBody>
       </p:sp>
       <p:sp>
         <p:nvSpPr>
@@ -13580,6 +13073,10 @@
           </a:solidFill>
           <a:ln/>
         </p:spPr>
+        <p:txBody>
+          <a:bodyPr/>
+          <a:p/>
+        </p:txBody>
       </p:sp>
       <p:sp>
         <p:nvSpPr>
@@ -13678,6 +13175,10 @@
           </a:solidFill>
           <a:ln/>
         </p:spPr>
+        <p:txBody>
+          <a:bodyPr/>
+          <a:p/>
+        </p:txBody>
       </p:sp>
       <p:sp>
         <p:nvSpPr>
@@ -13759,79 +13260,44 @@
       </p:sp>
       <p:sp>
         <p:nvSpPr>
-          <p:cNvPr id="16" name="Text 14"/>
-          <p:cNvSpPr txBox="1"/>
-          <p:nvPr/>
-        </p:nvSpPr>
-        <p:spPr>
-          <a:xfrm>
-            <a:off x="640080" y="6446520"/>
-            <a:ext cx="8686800" cy="292608"/>
-          </a:xfrm>
-          <a:prstGeom prst="rect">
-            <a:avLst/>
-          </a:prstGeom>
-          <a:noFill/>
-          <a:ln/>
-        </p:spPr>
-        <p:txBody>
-          <a:bodyPr wrap="square" lIns="0" tIns="0" rIns="0" bIns="0" rtlCol="0" anchor="ctr"/>
-          <a:lstStyle/>
-          <a:p>
-            <a:pPr algn="l" indent="0" marL="0">
-              <a:buNone/>
-            </a:pPr>
-            <a:r>
-              <a:rPr lang="en-US" sz="900" dirty="0">
-                <a:solidFill>
-                  <a:srgbClr val="5D5D72"/>
-                </a:solidFill>
-                <a:latin typeface="Calibri" pitchFamily="34" charset="0"/>
-                <a:ea typeface="Calibri" pitchFamily="34" charset="-122"/>
-                <a:cs typeface="Calibri" pitchFamily="34" charset="-120"/>
-              </a:rPr>
-              <a:t>Usman Akram  •  COMSATS University Islamabad</a:t>
-            </a:r>
-            <a:endParaRPr lang="en-US" sz="900" dirty="0"/>
-          </a:p>
-        </p:txBody>
-      </p:sp>
-      <p:sp>
-        <p:nvSpPr>
-          <p:cNvPr id="17" name="Text 15"/>
-          <p:cNvSpPr txBox="1"/>
-          <p:nvPr/>
-        </p:nvSpPr>
-        <p:spPr>
-          <a:xfrm>
-            <a:off x="11155680" y="6446520"/>
-            <a:ext cx="457200" cy="292608"/>
-          </a:xfrm>
-          <a:prstGeom prst="rect">
-            <a:avLst/>
-          </a:prstGeom>
-          <a:noFill/>
-          <a:ln/>
-        </p:spPr>
-        <p:txBody>
-          <a:bodyPr wrap="square" lIns="0" tIns="0" rIns="0" bIns="0" rtlCol="0" anchor="ctr"/>
-          <a:lstStyle/>
-          <a:p>
-            <a:pPr algn="r" indent="0" marL="0">
-              <a:buNone/>
-            </a:pPr>
-            <a:r>
-              <a:rPr lang="en-US" sz="900" dirty="0">
-                <a:solidFill>
-                  <a:srgbClr val="5D5D72"/>
-                </a:solidFill>
-                <a:latin typeface="Calibri" pitchFamily="34" charset="0"/>
-                <a:ea typeface="Calibri" pitchFamily="34" charset="-122"/>
-                <a:cs typeface="Calibri" pitchFamily="34" charset="-120"/>
-              </a:rPr>
-              <a:t>5</a:t>
-            </a:r>
-            <a:endParaRPr lang="en-US" sz="900" dirty="0"/>
+          <p:cNvPr id="18" name="cuinotes-footer-mark"/>
+          <p:cNvSpPr txBox="1"/>
+          <p:nvPr/>
+        </p:nvSpPr>
+        <p:spPr>
+          <a:xfrm>
+            <a:off x="9951720" y="6455664"/>
+            <a:ext cx="2011680" cy="292608"/>
+          </a:xfrm>
+          <a:prstGeom prst="rect">
+            <a:avLst/>
+          </a:prstGeom>
+          <a:noFill/>
+        </p:spPr>
+        <p:txBody>
+          <a:bodyPr wrap="none" lIns="0" rIns="0" tIns="0" bIns="0">
+            <a:spAutoFit/>
+          </a:bodyPr>
+          <a:lstStyle/>
+          <a:p>
+            <a:pPr algn="r"/>
+            <a:r>
+              <a:rPr sz="1000">
+                <a:solidFill>
+                  <a:srgbClr val="8A939B"/>
+                </a:solidFill>
+                <a:hlinkClick r:id="rId3"/>
+              </a:rPr>
+              <a:t>cuinotes.com</a:t>
+            </a:r>
+            <a:r>
+              <a:rPr sz="1000">
+                <a:solidFill>
+                  <a:srgbClr val="8A939B"/>
+                </a:solidFill>
+              </a:rPr>
+              <a:t>  ·  5</a:t>
+            </a:r>
           </a:p>
         </p:txBody>
       </p:sp>
@@ -13966,6 +13432,10 @@
           </a:solidFill>
           <a:ln/>
         </p:spPr>
+        <p:txBody>
+          <a:bodyPr/>
+          <a:p/>
+        </p:txBody>
       </p:sp>
       <p:sp>
         <p:nvSpPr>
@@ -14148,79 +13618,44 @@
       </p:sp>
       <p:sp>
         <p:nvSpPr>
-          <p:cNvPr id="7" name="Text 5"/>
-          <p:cNvSpPr txBox="1"/>
-          <p:nvPr/>
-        </p:nvSpPr>
-        <p:spPr>
-          <a:xfrm>
-            <a:off x="640080" y="6446520"/>
-            <a:ext cx="8686800" cy="292608"/>
-          </a:xfrm>
-          <a:prstGeom prst="rect">
-            <a:avLst/>
-          </a:prstGeom>
-          <a:noFill/>
-          <a:ln/>
-        </p:spPr>
-        <p:txBody>
-          <a:bodyPr wrap="square" lIns="0" tIns="0" rIns="0" bIns="0" rtlCol="0" anchor="ctr"/>
-          <a:lstStyle/>
-          <a:p>
-            <a:pPr algn="l" indent="0" marL="0">
-              <a:buNone/>
-            </a:pPr>
-            <a:r>
-              <a:rPr lang="en-US" sz="900" dirty="0">
-                <a:solidFill>
-                  <a:srgbClr val="5D5D72"/>
-                </a:solidFill>
-                <a:latin typeface="Calibri" pitchFamily="34" charset="0"/>
-                <a:ea typeface="Calibri" pitchFamily="34" charset="-122"/>
-                <a:cs typeface="Calibri" pitchFamily="34" charset="-120"/>
-              </a:rPr>
-              <a:t>Usman Akram  •  COMSATS University Islamabad</a:t>
-            </a:r>
-            <a:endParaRPr lang="en-US" sz="900" dirty="0"/>
-          </a:p>
-        </p:txBody>
-      </p:sp>
-      <p:sp>
-        <p:nvSpPr>
-          <p:cNvPr id="8" name="Text 6"/>
-          <p:cNvSpPr txBox="1"/>
-          <p:nvPr/>
-        </p:nvSpPr>
-        <p:spPr>
-          <a:xfrm>
-            <a:off x="11155680" y="6446520"/>
-            <a:ext cx="457200" cy="292608"/>
-          </a:xfrm>
-          <a:prstGeom prst="rect">
-            <a:avLst/>
-          </a:prstGeom>
-          <a:noFill/>
-          <a:ln/>
-        </p:spPr>
-        <p:txBody>
-          <a:bodyPr wrap="square" lIns="0" tIns="0" rIns="0" bIns="0" rtlCol="0" anchor="ctr"/>
-          <a:lstStyle/>
-          <a:p>
-            <a:pPr algn="r" indent="0" marL="0">
-              <a:buNone/>
-            </a:pPr>
-            <a:r>
-              <a:rPr lang="en-US" sz="900" dirty="0">
-                <a:solidFill>
-                  <a:srgbClr val="5D5D72"/>
-                </a:solidFill>
-                <a:latin typeface="Calibri" pitchFamily="34" charset="0"/>
-                <a:ea typeface="Calibri" pitchFamily="34" charset="-122"/>
-                <a:cs typeface="Calibri" pitchFamily="34" charset="-120"/>
-              </a:rPr>
-              <a:t>6</a:t>
-            </a:r>
-            <a:endParaRPr lang="en-US" sz="900" dirty="0"/>
+          <p:cNvPr id="9" name="cuinotes-footer-mark"/>
+          <p:cNvSpPr txBox="1"/>
+          <p:nvPr/>
+        </p:nvSpPr>
+        <p:spPr>
+          <a:xfrm>
+            <a:off x="9951720" y="6455664"/>
+            <a:ext cx="2011680" cy="292608"/>
+          </a:xfrm>
+          <a:prstGeom prst="rect">
+            <a:avLst/>
+          </a:prstGeom>
+          <a:noFill/>
+        </p:spPr>
+        <p:txBody>
+          <a:bodyPr wrap="none" lIns="0" rIns="0" tIns="0" bIns="0">
+            <a:spAutoFit/>
+          </a:bodyPr>
+          <a:lstStyle/>
+          <a:p>
+            <a:pPr algn="r"/>
+            <a:r>
+              <a:rPr sz="1000">
+                <a:solidFill>
+                  <a:srgbClr val="8A939B"/>
+                </a:solidFill>
+                <a:hlinkClick r:id="rId3"/>
+              </a:rPr>
+              <a:t>cuinotes.com</a:t>
+            </a:r>
+            <a:r>
+              <a:rPr sz="1000">
+                <a:solidFill>
+                  <a:srgbClr val="8A939B"/>
+                </a:solidFill>
+              </a:rPr>
+              <a:t>  ·  6</a:t>
+            </a:r>
           </a:p>
         </p:txBody>
       </p:sp>
@@ -14355,6 +13790,10 @@
           </a:solidFill>
           <a:ln/>
         </p:spPr>
+        <p:txBody>
+          <a:bodyPr/>
+          <a:p/>
+        </p:txBody>
       </p:sp>
       <p:sp>
         <p:nvSpPr>
@@ -14500,79 +13939,44 @@
       </p:sp>
       <p:sp>
         <p:nvSpPr>
-          <p:cNvPr id="6" name="Text 4"/>
-          <p:cNvSpPr txBox="1"/>
-          <p:nvPr/>
-        </p:nvSpPr>
-        <p:spPr>
-          <a:xfrm>
-            <a:off x="640080" y="6446520"/>
-            <a:ext cx="8686800" cy="292608"/>
-          </a:xfrm>
-          <a:prstGeom prst="rect">
-            <a:avLst/>
-          </a:prstGeom>
-          <a:noFill/>
-          <a:ln/>
-        </p:spPr>
-        <p:txBody>
-          <a:bodyPr wrap="square" lIns="0" tIns="0" rIns="0" bIns="0" rtlCol="0" anchor="ctr"/>
-          <a:lstStyle/>
-          <a:p>
-            <a:pPr algn="l" indent="0" marL="0">
-              <a:buNone/>
-            </a:pPr>
-            <a:r>
-              <a:rPr lang="en-US" sz="900" dirty="0">
-                <a:solidFill>
-                  <a:srgbClr val="5D5D72"/>
-                </a:solidFill>
-                <a:latin typeface="Calibri" pitchFamily="34" charset="0"/>
-                <a:ea typeface="Calibri" pitchFamily="34" charset="-122"/>
-                <a:cs typeface="Calibri" pitchFamily="34" charset="-120"/>
-              </a:rPr>
-              <a:t>Usman Akram  •  COMSATS University Islamabad</a:t>
-            </a:r>
-            <a:endParaRPr lang="en-US" sz="900" dirty="0"/>
-          </a:p>
-        </p:txBody>
-      </p:sp>
-      <p:sp>
-        <p:nvSpPr>
-          <p:cNvPr id="7" name="Text 5"/>
-          <p:cNvSpPr txBox="1"/>
-          <p:nvPr/>
-        </p:nvSpPr>
-        <p:spPr>
-          <a:xfrm>
-            <a:off x="11155680" y="6446520"/>
-            <a:ext cx="457200" cy="292608"/>
-          </a:xfrm>
-          <a:prstGeom prst="rect">
-            <a:avLst/>
-          </a:prstGeom>
-          <a:noFill/>
-          <a:ln/>
-        </p:spPr>
-        <p:txBody>
-          <a:bodyPr wrap="square" lIns="0" tIns="0" rIns="0" bIns="0" rtlCol="0" anchor="ctr"/>
-          <a:lstStyle/>
-          <a:p>
-            <a:pPr algn="r" indent="0" marL="0">
-              <a:buNone/>
-            </a:pPr>
-            <a:r>
-              <a:rPr lang="en-US" sz="900" dirty="0">
-                <a:solidFill>
-                  <a:srgbClr val="5D5D72"/>
-                </a:solidFill>
-                <a:latin typeface="Calibri" pitchFamily="34" charset="0"/>
-                <a:ea typeface="Calibri" pitchFamily="34" charset="-122"/>
-                <a:cs typeface="Calibri" pitchFamily="34" charset="-120"/>
-              </a:rPr>
-              <a:t>7</a:t>
-            </a:r>
-            <a:endParaRPr lang="en-US" sz="900" dirty="0"/>
+          <p:cNvPr id="8" name="cuinotes-footer-mark"/>
+          <p:cNvSpPr txBox="1"/>
+          <p:nvPr/>
+        </p:nvSpPr>
+        <p:spPr>
+          <a:xfrm>
+            <a:off x="9951720" y="6455664"/>
+            <a:ext cx="2011680" cy="292608"/>
+          </a:xfrm>
+          <a:prstGeom prst="rect">
+            <a:avLst/>
+          </a:prstGeom>
+          <a:noFill/>
+        </p:spPr>
+        <p:txBody>
+          <a:bodyPr wrap="none" lIns="0" rIns="0" tIns="0" bIns="0">
+            <a:spAutoFit/>
+          </a:bodyPr>
+          <a:lstStyle/>
+          <a:p>
+            <a:pPr algn="r"/>
+            <a:r>
+              <a:rPr sz="1000">
+                <a:solidFill>
+                  <a:srgbClr val="8A939B"/>
+                </a:solidFill>
+                <a:hlinkClick r:id="rId3"/>
+              </a:rPr>
+              <a:t>cuinotes.com</a:t>
+            </a:r>
+            <a:r>
+              <a:rPr sz="1000">
+                <a:solidFill>
+                  <a:srgbClr val="8A939B"/>
+                </a:solidFill>
+              </a:rPr>
+              <a:t>  ·  7</a:t>
+            </a:r>
           </a:p>
         </p:txBody>
       </p:sp>
@@ -14707,6 +14111,10 @@
           </a:solidFill>
           <a:ln/>
         </p:spPr>
+        <p:txBody>
+          <a:bodyPr/>
+          <a:p/>
+        </p:txBody>
       </p:sp>
       <p:sp>
         <p:nvSpPr>
@@ -14923,6 +14331,10 @@
             </a:outerShdw>
           </a:effectLst>
         </p:spPr>
+        <p:txBody>
+          <a:bodyPr/>
+          <a:p/>
+        </p:txBody>
       </p:sp>
       <p:pic>
         <p:nvPicPr>
@@ -14950,79 +14362,44 @@
       </p:pic>
       <p:sp>
         <p:nvSpPr>
-          <p:cNvPr id="8" name="Text 5"/>
-          <p:cNvSpPr txBox="1"/>
-          <p:nvPr/>
-        </p:nvSpPr>
-        <p:spPr>
-          <a:xfrm>
-            <a:off x="640080" y="6446520"/>
-            <a:ext cx="8686800" cy="292608"/>
-          </a:xfrm>
-          <a:prstGeom prst="rect">
-            <a:avLst/>
-          </a:prstGeom>
-          <a:noFill/>
-          <a:ln/>
-        </p:spPr>
-        <p:txBody>
-          <a:bodyPr wrap="square" lIns="0" tIns="0" rIns="0" bIns="0" rtlCol="0" anchor="ctr"/>
-          <a:lstStyle/>
-          <a:p>
-            <a:pPr algn="l" indent="0" marL="0">
-              <a:buNone/>
-            </a:pPr>
-            <a:r>
-              <a:rPr lang="en-US" sz="900" dirty="0">
-                <a:solidFill>
-                  <a:srgbClr val="5D5D72"/>
-                </a:solidFill>
-                <a:latin typeface="Calibri" pitchFamily="34" charset="0"/>
-                <a:ea typeface="Calibri" pitchFamily="34" charset="-122"/>
-                <a:cs typeface="Calibri" pitchFamily="34" charset="-120"/>
-              </a:rPr>
-              <a:t>Usman Akram  •  COMSATS University Islamabad</a:t>
-            </a:r>
-            <a:endParaRPr lang="en-US" sz="900" dirty="0"/>
-          </a:p>
-        </p:txBody>
-      </p:sp>
-      <p:sp>
-        <p:nvSpPr>
-          <p:cNvPr id="9" name="Text 6"/>
-          <p:cNvSpPr txBox="1"/>
-          <p:nvPr/>
-        </p:nvSpPr>
-        <p:spPr>
-          <a:xfrm>
-            <a:off x="11155680" y="6446520"/>
-            <a:ext cx="457200" cy="292608"/>
-          </a:xfrm>
-          <a:prstGeom prst="rect">
-            <a:avLst/>
-          </a:prstGeom>
-          <a:noFill/>
-          <a:ln/>
-        </p:spPr>
-        <p:txBody>
-          <a:bodyPr wrap="square" lIns="0" tIns="0" rIns="0" bIns="0" rtlCol="0" anchor="ctr"/>
-          <a:lstStyle/>
-          <a:p>
-            <a:pPr algn="r" indent="0" marL="0">
-              <a:buNone/>
-            </a:pPr>
-            <a:r>
-              <a:rPr lang="en-US" sz="900" dirty="0">
-                <a:solidFill>
-                  <a:srgbClr val="5D5D72"/>
-                </a:solidFill>
-                <a:latin typeface="Calibri" pitchFamily="34" charset="0"/>
-                <a:ea typeface="Calibri" pitchFamily="34" charset="-122"/>
-                <a:cs typeface="Calibri" pitchFamily="34" charset="-120"/>
-              </a:rPr>
-              <a:t>8</a:t>
-            </a:r>
-            <a:endParaRPr lang="en-US" sz="900" dirty="0"/>
+          <p:cNvPr id="10" name="cuinotes-footer-mark"/>
+          <p:cNvSpPr txBox="1"/>
+          <p:nvPr/>
+        </p:nvSpPr>
+        <p:spPr>
+          <a:xfrm>
+            <a:off x="9951720" y="6455664"/>
+            <a:ext cx="2011680" cy="292608"/>
+          </a:xfrm>
+          <a:prstGeom prst="rect">
+            <a:avLst/>
+          </a:prstGeom>
+          <a:noFill/>
+        </p:spPr>
+        <p:txBody>
+          <a:bodyPr wrap="none" lIns="0" rIns="0" tIns="0" bIns="0">
+            <a:spAutoFit/>
+          </a:bodyPr>
+          <a:lstStyle/>
+          <a:p>
+            <a:pPr algn="r"/>
+            <a:r>
+              <a:rPr sz="1000">
+                <a:solidFill>
+                  <a:srgbClr val="8A939B"/>
+                </a:solidFill>
+                <a:hlinkClick r:id="rId4"/>
+              </a:rPr>
+              <a:t>cuinotes.com</a:t>
+            </a:r>
+            <a:r>
+              <a:rPr sz="1000">
+                <a:solidFill>
+                  <a:srgbClr val="8A939B"/>
+                </a:solidFill>
+              </a:rPr>
+              <a:t>  ·  8</a:t>
+            </a:r>
           </a:p>
         </p:txBody>
       </p:sp>
@@ -15162,6 +14539,10 @@
             <a:prstDash val="solid"/>
           </a:ln>
         </p:spPr>
+        <p:txBody>
+          <a:bodyPr/>
+          <a:p/>
+        </p:txBody>
       </p:sp>
       <p:sp>
         <p:nvSpPr>
@@ -15243,79 +14624,44 @@
       </p:sp>
       <p:sp>
         <p:nvSpPr>
-          <p:cNvPr id="7" name="Text 5"/>
-          <p:cNvSpPr txBox="1"/>
-          <p:nvPr/>
-        </p:nvSpPr>
-        <p:spPr>
-          <a:xfrm>
-            <a:off x="640080" y="6446520"/>
-            <a:ext cx="8686800" cy="292608"/>
-          </a:xfrm>
-          <a:prstGeom prst="rect">
-            <a:avLst/>
-          </a:prstGeom>
-          <a:noFill/>
-          <a:ln/>
-        </p:spPr>
-        <p:txBody>
-          <a:bodyPr wrap="square" lIns="0" tIns="0" rIns="0" bIns="0" rtlCol="0" anchor="ctr"/>
-          <a:lstStyle/>
-          <a:p>
-            <a:pPr algn="l" indent="0" marL="0">
-              <a:buNone/>
-            </a:pPr>
-            <a:r>
-              <a:rPr lang="en-US" sz="900" dirty="0">
-                <a:solidFill>
-                  <a:srgbClr val="5D5D72"/>
-                </a:solidFill>
-                <a:latin typeface="Calibri" pitchFamily="34" charset="0"/>
-                <a:ea typeface="Calibri" pitchFamily="34" charset="-122"/>
-                <a:cs typeface="Calibri" pitchFamily="34" charset="-120"/>
-              </a:rPr>
-              <a:t>Usman Akram  •  COMSATS University Islamabad</a:t>
-            </a:r>
-            <a:endParaRPr lang="en-US" sz="900" dirty="0"/>
-          </a:p>
-        </p:txBody>
-      </p:sp>
-      <p:sp>
-        <p:nvSpPr>
-          <p:cNvPr id="8" name="Text 6"/>
-          <p:cNvSpPr txBox="1"/>
-          <p:nvPr/>
-        </p:nvSpPr>
-        <p:spPr>
-          <a:xfrm>
-            <a:off x="11155680" y="6446520"/>
-            <a:ext cx="457200" cy="292608"/>
-          </a:xfrm>
-          <a:prstGeom prst="rect">
-            <a:avLst/>
-          </a:prstGeom>
-          <a:noFill/>
-          <a:ln/>
-        </p:spPr>
-        <p:txBody>
-          <a:bodyPr wrap="square" lIns="0" tIns="0" rIns="0" bIns="0" rtlCol="0" anchor="ctr"/>
-          <a:lstStyle/>
-          <a:p>
-            <a:pPr algn="r" indent="0" marL="0">
-              <a:buNone/>
-            </a:pPr>
-            <a:r>
-              <a:rPr lang="en-US" sz="900" dirty="0">
-                <a:solidFill>
-                  <a:srgbClr val="5D5D72"/>
-                </a:solidFill>
-                <a:latin typeface="Calibri" pitchFamily="34" charset="0"/>
-                <a:ea typeface="Calibri" pitchFamily="34" charset="-122"/>
-                <a:cs typeface="Calibri" pitchFamily="34" charset="-120"/>
-              </a:rPr>
-              <a:t>9</a:t>
-            </a:r>
-            <a:endParaRPr lang="en-US" sz="900" dirty="0"/>
+          <p:cNvPr id="9" name="cuinotes-footer-mark"/>
+          <p:cNvSpPr txBox="1"/>
+          <p:nvPr/>
+        </p:nvSpPr>
+        <p:spPr>
+          <a:xfrm>
+            <a:off x="9951720" y="6455664"/>
+            <a:ext cx="2011680" cy="292608"/>
+          </a:xfrm>
+          <a:prstGeom prst="rect">
+            <a:avLst/>
+          </a:prstGeom>
+          <a:noFill/>
+        </p:spPr>
+        <p:txBody>
+          <a:bodyPr wrap="none" lIns="0" rIns="0" tIns="0" bIns="0">
+            <a:spAutoFit/>
+          </a:bodyPr>
+          <a:lstStyle/>
+          <a:p>
+            <a:pPr algn="r"/>
+            <a:r>
+              <a:rPr sz="1000">
+                <a:solidFill>
+                  <a:srgbClr val="8A939B"/>
+                </a:solidFill>
+                <a:hlinkClick r:id="rId3"/>
+              </a:rPr>
+              <a:t>cuinotes.com</a:t>
+            </a:r>
+            <a:r>
+              <a:rPr sz="1000">
+                <a:solidFill>
+                  <a:srgbClr val="8A939B"/>
+                </a:solidFill>
+              </a:rPr>
+              <a:t>  ·  9</a:t>
+            </a:r>
           </a:p>
         </p:txBody>
       </p:sp>

--- a/slides/CSC336-Lecture-24-Response-Generation-with-Templates.pptx
+++ b/slides/CSC336-Lecture-24-Response-Generation-with-Templates.pptx
@@ -3449,9 +3449,13 @@
             </a:avLst>
           </a:prstGeom>
           <a:solidFill>
-            <a:srgbClr val="1E1E4C"/>
+            <a:srgbClr val="F7F8F9"/>
           </a:solidFill>
-          <a:ln/>
+          <a:ln w="9525">
+            <a:solidFill>
+              <a:srgbClr val="D0D5DD"/>
+            </a:solidFill>
+          </a:ln>
         </p:spPr>
         <p:txBody>
           <a:bodyPr/>
@@ -3488,7 +3492,7 @@
             <a:r>
               <a:rPr lang="en-US" sz="1400" dirty="0">
                 <a:solidFill>
-                  <a:srgbClr val="C9D3F5"/>
+                  <a:srgbClr val="1F2429"/>
                 </a:solidFill>
                 <a:latin typeface="Courier New" pitchFamily="34" charset="0"/>
                 <a:ea typeface="Courier New" pitchFamily="34" charset="-122"/>
@@ -3508,7 +3512,7 @@
             <a:r>
               <a:rPr lang="en-US" sz="1400" dirty="0">
                 <a:solidFill>
-                  <a:srgbClr val="C9D3F5"/>
+                  <a:srgbClr val="1F2429"/>
                 </a:solidFill>
                 <a:latin typeface="Courier New" pitchFamily="34" charset="0"/>
                 <a:ea typeface="Courier New" pitchFamily="34" charset="-122"/>
@@ -3528,7 +3532,7 @@
             <a:r>
               <a:rPr lang="en-US" sz="1400" dirty="0">
                 <a:solidFill>
-                  <a:srgbClr val="C9D3F5"/>
+                  <a:srgbClr val="1F2429"/>
                 </a:solidFill>
                 <a:latin typeface="Courier New" pitchFamily="34" charset="0"/>
                 <a:ea typeface="Courier New" pitchFamily="34" charset="-122"/>
@@ -3548,7 +3552,7 @@
             <a:r>
               <a:rPr lang="en-US" sz="1400" dirty="0">
                 <a:solidFill>
-                  <a:srgbClr val="C9D3F5"/>
+                  <a:srgbClr val="1F2429"/>
                 </a:solidFill>
                 <a:latin typeface="Courier New" pitchFamily="34" charset="0"/>
                 <a:ea typeface="Courier New" pitchFamily="34" charset="-122"/>
@@ -3568,7 +3572,7 @@
             <a:r>
               <a:rPr lang="en-US" sz="1400" dirty="0">
                 <a:solidFill>
-                  <a:srgbClr val="C9D3F5"/>
+                  <a:srgbClr val="1F2429"/>
                 </a:solidFill>
                 <a:latin typeface="Courier New" pitchFamily="34" charset="0"/>
                 <a:ea typeface="Courier New" pitchFamily="34" charset="-122"/>
@@ -3588,7 +3592,7 @@
             <a:r>
               <a:rPr lang="en-US" sz="1400" dirty="0">
                 <a:solidFill>
-                  <a:srgbClr val="C9D3F5"/>
+                  <a:srgbClr val="1F2429"/>
                 </a:solidFill>
                 <a:latin typeface="Courier New" pitchFamily="34" charset="0"/>
                 <a:ea typeface="Courier New" pitchFamily="34" charset="-122"/>
@@ -3608,7 +3612,7 @@
             <a:r>
               <a:rPr lang="en-US" sz="1400" dirty="0">
                 <a:solidFill>
-                  <a:srgbClr val="C9D3F5"/>
+                  <a:srgbClr val="1F2429"/>
                 </a:solidFill>
                 <a:latin typeface="Courier New" pitchFamily="34" charset="0"/>
                 <a:ea typeface="Courier New" pitchFamily="34" charset="-122"/>
@@ -3628,7 +3632,7 @@
             <a:r>
               <a:rPr lang="en-US" sz="1400" dirty="0">
                 <a:solidFill>
-                  <a:srgbClr val="C9D3F5"/>
+                  <a:srgbClr val="1F2429"/>
                 </a:solidFill>
                 <a:latin typeface="Courier New" pitchFamily="34" charset="0"/>
                 <a:ea typeface="Courier New" pitchFamily="34" charset="-122"/>
@@ -3810,9 +3814,13 @@
             </a:avLst>
           </a:prstGeom>
           <a:solidFill>
-            <a:srgbClr val="1E1E4C"/>
+            <a:srgbClr val="F7F8F9"/>
           </a:solidFill>
-          <a:ln/>
+          <a:ln w="9525">
+            <a:solidFill>
+              <a:srgbClr val="D0D5DD"/>
+            </a:solidFill>
+          </a:ln>
         </p:spPr>
         <p:txBody>
           <a:bodyPr/>
@@ -3849,7 +3857,7 @@
             <a:r>
               <a:rPr lang="en-US" sz="1110" dirty="0">
                 <a:solidFill>
-                  <a:srgbClr val="C9D3F5"/>
+                  <a:srgbClr val="1F2429"/>
                 </a:solidFill>
                 <a:latin typeface="Courier New" pitchFamily="34" charset="0"/>
                 <a:ea typeface="Courier New" pitchFamily="34" charset="-122"/>
@@ -3869,7 +3877,7 @@
             <a:r>
               <a:rPr lang="en-US" sz="1110" dirty="0">
                 <a:solidFill>
-                  <a:srgbClr val="C9D3F5"/>
+                  <a:srgbClr val="1F2429"/>
                 </a:solidFill>
                 <a:latin typeface="Courier New" pitchFamily="34" charset="0"/>
                 <a:ea typeface="Courier New" pitchFamily="34" charset="-122"/>
@@ -3889,7 +3897,7 @@
             <a:r>
               <a:rPr lang="en-US" sz="1110" dirty="0">
                 <a:solidFill>
-                  <a:srgbClr val="C9D3F5"/>
+                  <a:srgbClr val="1F2429"/>
                 </a:solidFill>
                 <a:latin typeface="Courier New" pitchFamily="34" charset="0"/>
                 <a:ea typeface="Courier New" pitchFamily="34" charset="-122"/>
@@ -3909,7 +3917,7 @@
             <a:r>
               <a:rPr lang="en-US" sz="1110" dirty="0">
                 <a:solidFill>
-                  <a:srgbClr val="C9D3F5"/>
+                  <a:srgbClr val="1F2429"/>
                 </a:solidFill>
                 <a:latin typeface="Courier New" pitchFamily="34" charset="0"/>
                 <a:ea typeface="Courier New" pitchFamily="34" charset="-122"/>
@@ -3929,7 +3937,7 @@
             <a:r>
               <a:rPr lang="en-US" sz="1110" dirty="0">
                 <a:solidFill>
-                  <a:srgbClr val="C9D3F5"/>
+                  <a:srgbClr val="1F2429"/>
                 </a:solidFill>
                 <a:latin typeface="Courier New" pitchFamily="34" charset="0"/>
                 <a:ea typeface="Courier New" pitchFamily="34" charset="-122"/>
@@ -3949,7 +3957,7 @@
             <a:r>
               <a:rPr lang="en-US" sz="1110" dirty="0">
                 <a:solidFill>
-                  <a:srgbClr val="C9D3F5"/>
+                  <a:srgbClr val="1F2429"/>
                 </a:solidFill>
                 <a:latin typeface="Courier New" pitchFamily="34" charset="0"/>
                 <a:ea typeface="Courier New" pitchFamily="34" charset="-122"/>
@@ -3969,7 +3977,7 @@
             <a:r>
               <a:rPr lang="en-US" sz="1110" dirty="0">
                 <a:solidFill>
-                  <a:srgbClr val="C9D3F5"/>
+                  <a:srgbClr val="1F2429"/>
                 </a:solidFill>
                 <a:latin typeface="Courier New" pitchFamily="34" charset="0"/>
                 <a:ea typeface="Courier New" pitchFamily="34" charset="-122"/>
@@ -3989,7 +3997,7 @@
             <a:r>
               <a:rPr lang="en-US" sz="1110" dirty="0">
                 <a:solidFill>
-                  <a:srgbClr val="C9D3F5"/>
+                  <a:srgbClr val="1F2429"/>
                 </a:solidFill>
                 <a:latin typeface="Courier New" pitchFamily="34" charset="0"/>
                 <a:ea typeface="Courier New" pitchFamily="34" charset="-122"/>
@@ -4009,7 +4017,7 @@
             <a:r>
               <a:rPr lang="en-US" sz="1110" dirty="0">
                 <a:solidFill>
-                  <a:srgbClr val="C9D3F5"/>
+                  <a:srgbClr val="1F2429"/>
                 </a:solidFill>
                 <a:latin typeface="Courier New" pitchFamily="34" charset="0"/>
                 <a:ea typeface="Courier New" pitchFamily="34" charset="-122"/>
@@ -4029,7 +4037,7 @@
             <a:r>
               <a:rPr lang="en-US" sz="1110" dirty="0">
                 <a:solidFill>
-                  <a:srgbClr val="C9D3F5"/>
+                  <a:srgbClr val="1F2429"/>
                 </a:solidFill>
                 <a:latin typeface="Courier New" pitchFamily="34" charset="0"/>
                 <a:ea typeface="Courier New" pitchFamily="34" charset="-122"/>
@@ -4049,7 +4057,7 @@
             <a:r>
               <a:rPr lang="en-US" sz="1110" dirty="0">
                 <a:solidFill>
-                  <a:srgbClr val="C9D3F5"/>
+                  <a:srgbClr val="1F2429"/>
                 </a:solidFill>
                 <a:latin typeface="Courier New" pitchFamily="34" charset="0"/>
                 <a:ea typeface="Courier New" pitchFamily="34" charset="-122"/>
@@ -4069,7 +4077,7 @@
             <a:r>
               <a:rPr lang="en-US" sz="1110" dirty="0">
                 <a:solidFill>
-                  <a:srgbClr val="C9D3F5"/>
+                  <a:srgbClr val="1F2429"/>
                 </a:solidFill>
                 <a:latin typeface="Courier New" pitchFamily="34" charset="0"/>
                 <a:ea typeface="Courier New" pitchFamily="34" charset="-122"/>
@@ -4089,7 +4097,7 @@
             <a:r>
               <a:rPr lang="en-US" sz="1110" dirty="0">
                 <a:solidFill>
-                  <a:srgbClr val="C9D3F5"/>
+                  <a:srgbClr val="1F2429"/>
                 </a:solidFill>
                 <a:latin typeface="Courier New" pitchFamily="34" charset="0"/>
                 <a:ea typeface="Courier New" pitchFamily="34" charset="-122"/>
@@ -4109,7 +4117,7 @@
             <a:r>
               <a:rPr lang="en-US" sz="1110" dirty="0">
                 <a:solidFill>
-                  <a:srgbClr val="C9D3F5"/>
+                  <a:srgbClr val="1F2429"/>
                 </a:solidFill>
                 <a:latin typeface="Courier New" pitchFamily="34" charset="0"/>
                 <a:ea typeface="Courier New" pitchFamily="34" charset="-122"/>
@@ -4129,7 +4137,7 @@
             <a:r>
               <a:rPr lang="en-US" sz="1110" dirty="0">
                 <a:solidFill>
-                  <a:srgbClr val="C9D3F5"/>
+                  <a:srgbClr val="1F2429"/>
                 </a:solidFill>
                 <a:latin typeface="Courier New" pitchFamily="34" charset="0"/>
                 <a:ea typeface="Courier New" pitchFamily="34" charset="-122"/>
@@ -4149,7 +4157,7 @@
             <a:r>
               <a:rPr lang="en-US" sz="1110" dirty="0">
                 <a:solidFill>
-                  <a:srgbClr val="C9D3F5"/>
+                  <a:srgbClr val="1F2429"/>
                 </a:solidFill>
                 <a:latin typeface="Courier New" pitchFamily="34" charset="0"/>
                 <a:ea typeface="Courier New" pitchFamily="34" charset="-122"/>
@@ -4331,9 +4339,13 @@
             </a:avLst>
           </a:prstGeom>
           <a:solidFill>
-            <a:srgbClr val="1E1E4C"/>
+            <a:srgbClr val="F7F8F9"/>
           </a:solidFill>
-          <a:ln/>
+          <a:ln w="9525">
+            <a:solidFill>
+              <a:srgbClr val="D0D5DD"/>
+            </a:solidFill>
+          </a:ln>
         </p:spPr>
         <p:txBody>
           <a:bodyPr/>
@@ -4370,7 +4382,7 @@
             <a:r>
               <a:rPr lang="en-US" sz="1300" dirty="0">
                 <a:solidFill>
-                  <a:srgbClr val="C9D3F5"/>
+                  <a:srgbClr val="1F2429"/>
                 </a:solidFill>
                 <a:latin typeface="Courier New" pitchFamily="34" charset="0"/>
                 <a:ea typeface="Courier New" pitchFamily="34" charset="-122"/>
@@ -4390,7 +4402,7 @@
             <a:r>
               <a:rPr lang="en-US" sz="1300" dirty="0">
                 <a:solidFill>
-                  <a:srgbClr val="C9D3F5"/>
+                  <a:srgbClr val="1F2429"/>
                 </a:solidFill>
                 <a:latin typeface="Courier New" pitchFamily="34" charset="0"/>
                 <a:ea typeface="Courier New" pitchFamily="34" charset="-122"/>
@@ -4410,7 +4422,7 @@
             <a:r>
               <a:rPr lang="en-US" sz="1300" dirty="0">
                 <a:solidFill>
-                  <a:srgbClr val="C9D3F5"/>
+                  <a:srgbClr val="1F2429"/>
                 </a:solidFill>
                 <a:latin typeface="Courier New" pitchFamily="34" charset="0"/>
                 <a:ea typeface="Courier New" pitchFamily="34" charset="-122"/>
@@ -4430,7 +4442,7 @@
             <a:r>
               <a:rPr lang="en-US" sz="1300" dirty="0">
                 <a:solidFill>
-                  <a:srgbClr val="C9D3F5"/>
+                  <a:srgbClr val="1F2429"/>
                 </a:solidFill>
                 <a:latin typeface="Courier New" pitchFamily="34" charset="0"/>
                 <a:ea typeface="Courier New" pitchFamily="34" charset="-122"/>
@@ -4450,7 +4462,7 @@
             <a:r>
               <a:rPr lang="en-US" sz="1300" dirty="0">
                 <a:solidFill>
-                  <a:srgbClr val="C9D3F5"/>
+                  <a:srgbClr val="1F2429"/>
                 </a:solidFill>
                 <a:latin typeface="Courier New" pitchFamily="34" charset="0"/>
                 <a:ea typeface="Courier New" pitchFamily="34" charset="-122"/>
@@ -4470,7 +4482,7 @@
             <a:r>
               <a:rPr lang="en-US" sz="1300" dirty="0">
                 <a:solidFill>
-                  <a:srgbClr val="C9D3F5"/>
+                  <a:srgbClr val="1F2429"/>
                 </a:solidFill>
                 <a:latin typeface="Courier New" pitchFamily="34" charset="0"/>
                 <a:ea typeface="Courier New" pitchFamily="34" charset="-122"/>
@@ -4490,7 +4502,7 @@
             <a:r>
               <a:rPr lang="en-US" sz="1300" dirty="0">
                 <a:solidFill>
-                  <a:srgbClr val="C9D3F5"/>
+                  <a:srgbClr val="1F2429"/>
                 </a:solidFill>
                 <a:latin typeface="Courier New" pitchFamily="34" charset="0"/>
                 <a:ea typeface="Courier New" pitchFamily="34" charset="-122"/>
@@ -4510,7 +4522,7 @@
             <a:r>
               <a:rPr lang="en-US" sz="1300" dirty="0">
                 <a:solidFill>
-                  <a:srgbClr val="C9D3F5"/>
+                  <a:srgbClr val="1F2429"/>
                 </a:solidFill>
                 <a:latin typeface="Courier New" pitchFamily="34" charset="0"/>
                 <a:ea typeface="Courier New" pitchFamily="34" charset="-122"/>
@@ -4530,7 +4542,7 @@
             <a:r>
               <a:rPr lang="en-US" sz="1300" dirty="0">
                 <a:solidFill>
-                  <a:srgbClr val="C9D3F5"/>
+                  <a:srgbClr val="1F2429"/>
                 </a:solidFill>
                 <a:latin typeface="Courier New" pitchFamily="34" charset="0"/>
                 <a:ea typeface="Courier New" pitchFamily="34" charset="-122"/>
@@ -4550,7 +4562,7 @@
             <a:r>
               <a:rPr lang="en-US" sz="1300" dirty="0">
                 <a:solidFill>
-                  <a:srgbClr val="C9D3F5"/>
+                  <a:srgbClr val="1F2429"/>
                 </a:solidFill>
                 <a:latin typeface="Courier New" pitchFamily="34" charset="0"/>
                 <a:ea typeface="Courier New" pitchFamily="34" charset="-122"/>
@@ -4570,7 +4582,7 @@
             <a:r>
               <a:rPr lang="en-US" sz="1300" dirty="0">
                 <a:solidFill>
-                  <a:srgbClr val="C9D3F5"/>
+                  <a:srgbClr val="1F2429"/>
                 </a:solidFill>
                 <a:latin typeface="Courier New" pitchFamily="34" charset="0"/>
                 <a:ea typeface="Courier New" pitchFamily="34" charset="-122"/>
@@ -4590,7 +4602,7 @@
             <a:r>
               <a:rPr lang="en-US" sz="1300" dirty="0">
                 <a:solidFill>
-                  <a:srgbClr val="C9D3F5"/>
+                  <a:srgbClr val="1F2429"/>
                 </a:solidFill>
                 <a:latin typeface="Courier New" pitchFamily="34" charset="0"/>
                 <a:ea typeface="Courier New" pitchFamily="34" charset="-122"/>
@@ -5191,9 +5203,13 @@
             </a:avLst>
           </a:prstGeom>
           <a:solidFill>
-            <a:srgbClr val="1E1E4C"/>
+            <a:srgbClr val="F7F8F9"/>
           </a:solidFill>
-          <a:ln/>
+          <a:ln w="9525">
+            <a:solidFill>
+              <a:srgbClr val="D0D5DD"/>
+            </a:solidFill>
+          </a:ln>
         </p:spPr>
         <p:txBody>
           <a:bodyPr/>
@@ -5230,7 +5246,7 @@
             <a:r>
               <a:rPr lang="en-US" sz="1400" dirty="0">
                 <a:solidFill>
-                  <a:srgbClr val="C9D3F5"/>
+                  <a:srgbClr val="1F2429"/>
                 </a:solidFill>
                 <a:latin typeface="Courier New" pitchFamily="34" charset="0"/>
                 <a:ea typeface="Courier New" pitchFamily="34" charset="-122"/>
@@ -5250,7 +5266,7 @@
             <a:r>
               <a:rPr lang="en-US" sz="1400" dirty="0">
                 <a:solidFill>
-                  <a:srgbClr val="C9D3F5"/>
+                  <a:srgbClr val="1F2429"/>
                 </a:solidFill>
                 <a:latin typeface="Courier New" pitchFamily="34" charset="0"/>
                 <a:ea typeface="Courier New" pitchFamily="34" charset="-122"/>
@@ -5270,7 +5286,7 @@
             <a:r>
               <a:rPr lang="en-US" sz="1400" dirty="0">
                 <a:solidFill>
-                  <a:srgbClr val="C9D3F5"/>
+                  <a:srgbClr val="1F2429"/>
                 </a:solidFill>
                 <a:latin typeface="Courier New" pitchFamily="34" charset="0"/>
                 <a:ea typeface="Courier New" pitchFamily="34" charset="-122"/>
@@ -5290,7 +5306,7 @@
             <a:r>
               <a:rPr lang="en-US" sz="1400" dirty="0">
                 <a:solidFill>
-                  <a:srgbClr val="C9D3F5"/>
+                  <a:srgbClr val="1F2429"/>
                 </a:solidFill>
                 <a:latin typeface="Courier New" pitchFamily="34" charset="0"/>
                 <a:ea typeface="Courier New" pitchFamily="34" charset="-122"/>
@@ -5310,7 +5326,7 @@
             <a:r>
               <a:rPr lang="en-US" sz="1400" dirty="0">
                 <a:solidFill>
-                  <a:srgbClr val="C9D3F5"/>
+                  <a:srgbClr val="1F2429"/>
                 </a:solidFill>
                 <a:latin typeface="Courier New" pitchFamily="34" charset="0"/>
                 <a:ea typeface="Courier New" pitchFamily="34" charset="-122"/>
@@ -5339,7 +5355,7 @@
             <a:r>
               <a:rPr lang="en-US" sz="1400" dirty="0">
                 <a:solidFill>
-                  <a:srgbClr val="C9D3F5"/>
+                  <a:srgbClr val="1F2429"/>
                 </a:solidFill>
                 <a:latin typeface="Courier New" pitchFamily="34" charset="0"/>
                 <a:ea typeface="Courier New" pitchFamily="34" charset="-122"/>
@@ -5359,7 +5375,7 @@
             <a:r>
               <a:rPr lang="en-US" sz="1400" dirty="0">
                 <a:solidFill>
-                  <a:srgbClr val="C9D3F5"/>
+                  <a:srgbClr val="1F2429"/>
                 </a:solidFill>
                 <a:latin typeface="Courier New" pitchFamily="34" charset="0"/>
                 <a:ea typeface="Courier New" pitchFamily="34" charset="-122"/>
@@ -5379,7 +5395,7 @@
             <a:r>
               <a:rPr lang="en-US" sz="1400" dirty="0">
                 <a:solidFill>
-                  <a:srgbClr val="C9D3F5"/>
+                  <a:srgbClr val="1F2429"/>
                 </a:solidFill>
                 <a:latin typeface="Courier New" pitchFamily="34" charset="0"/>
                 <a:ea typeface="Courier New" pitchFamily="34" charset="-122"/>
@@ -5399,7 +5415,7 @@
             <a:r>
               <a:rPr lang="en-US" sz="1400" dirty="0">
                 <a:solidFill>
-                  <a:srgbClr val="C9D3F5"/>
+                  <a:srgbClr val="1F2429"/>
                 </a:solidFill>
                 <a:latin typeface="Courier New" pitchFamily="34" charset="0"/>
                 <a:ea typeface="Courier New" pitchFamily="34" charset="-122"/>
@@ -5573,7 +5589,7 @@
         <p:spPr>
           <a:xfrm>
             <a:off x="640080" y="1965960"/>
-            <a:ext cx="10911535" cy="1737360"/>
+            <a:ext cx="10911535" cy="3980000"/>
           </a:xfrm>
           <a:prstGeom prst="roundRect">
             <a:avLst>
@@ -5604,7 +5620,7 @@
         <p:spPr>
           <a:xfrm>
             <a:off x="868680" y="2103120"/>
-            <a:ext cx="10454335" cy="274320"/>
+            <a:ext cx="10454335" cy="400000"/>
           </a:xfrm>
           <a:prstGeom prst="rect">
             <a:avLst/>
@@ -5620,7 +5636,7 @@
               <a:buNone/>
             </a:pPr>
             <a:r>
-              <a:rPr lang="en-US" sz="1000" b="1" spc="200" kern="0" dirty="0">
+              <a:rPr lang="en-US" sz="1800" b="1" spc="200" kern="0" dirty="0">
                 <a:solidFill>
                   <a:srgbClr val="33459E"/>
                 </a:solidFill>
@@ -5630,7 +5646,7 @@
               </a:rPr>
               <a:t>NOTE</a:t>
             </a:r>
-            <a:endParaRPr lang="en-US" sz="1000" dirty="0"/>
+            <a:endParaRPr lang="en-US" sz="1800" dirty="0"/>
           </a:p>
         </p:txBody>
       </p:sp>
@@ -5642,24 +5658,24 @@
         </p:nvSpPr>
         <p:spPr>
           <a:xfrm>
-            <a:off x="868680" y="2404872"/>
-            <a:ext cx="10454335" cy="1143000"/>
-          </a:xfrm>
-          <a:prstGeom prst="rect">
-            <a:avLst/>
-          </a:prstGeom>
-          <a:noFill/>
-          <a:ln/>
-        </p:spPr>
-        <p:txBody>
-          <a:bodyPr wrap="square" lIns="0" tIns="0" rIns="0" bIns="0" rtlCol="0" anchor="t"/>
-          <a:lstStyle/>
-          <a:p>
-            <a:pPr indent="0" marL="0">
-              <a:buNone/>
-            </a:pPr>
-            <a:r>
-              <a:rPr lang="en-US" sz="1250" dirty="0">
+            <a:off x="868680" y="2795960"/>
+            <a:ext cx="10454335" cy="3000000"/>
+          </a:xfrm>
+          <a:prstGeom prst="rect">
+            <a:avLst/>
+          </a:prstGeom>
+          <a:noFill/>
+          <a:ln/>
+        </p:spPr>
+        <p:txBody>
+          <a:bodyPr wrap="square" lIns="0" tIns="0" rIns="0" bIns="0" rtlCol="0" anchor="ctr"/>
+          <a:lstStyle/>
+          <a:p>
+            <a:pPr indent="0" marL="0">
+              <a:buNone/>
+            </a:pPr>
+            <a:r>
+              <a:rPr lang="en-US" sz="2800" dirty="0">
                 <a:solidFill>
                   <a:srgbClr val="26262F"/>
                 </a:solidFill>
@@ -5669,7 +5685,7 @@
               </a:rPr>
               <a:t>include() returns raw HTML, so we use &lt;%- %&gt; (the unescaped output tag) instead of &lt;%= %&gt; — otherwise the header's own HTML tags would show up as literal text like &amp;lt;header&amp;gt; instead of being rendered.</a:t>
             </a:r>
-            <a:endParaRPr lang="en-US" sz="1250" dirty="0"/>
+            <a:endParaRPr lang="en-US" sz="2800" dirty="0"/>
           </a:p>
         </p:txBody>
       </p:sp>
@@ -6200,9 +6216,13 @@
             </a:avLst>
           </a:prstGeom>
           <a:solidFill>
-            <a:srgbClr val="1E1E4C"/>
+            <a:srgbClr val="F7F8F9"/>
           </a:solidFill>
-          <a:ln/>
+          <a:ln w="9525">
+            <a:solidFill>
+              <a:srgbClr val="D0D5DD"/>
+            </a:solidFill>
+          </a:ln>
         </p:spPr>
         <p:txBody>
           <a:bodyPr/>
@@ -6239,7 +6259,7 @@
             <a:r>
               <a:rPr lang="en-US" sz="1400" dirty="0">
                 <a:solidFill>
-                  <a:srgbClr val="C9D3F5"/>
+                  <a:srgbClr val="1F2429"/>
                 </a:solidFill>
                 <a:latin typeface="Courier New" pitchFamily="34" charset="0"/>
                 <a:ea typeface="Courier New" pitchFamily="34" charset="-122"/>
@@ -6259,7 +6279,7 @@
             <a:r>
               <a:rPr lang="en-US" sz="1400" dirty="0">
                 <a:solidFill>
-                  <a:srgbClr val="C9D3F5"/>
+                  <a:srgbClr val="1F2429"/>
                 </a:solidFill>
                 <a:latin typeface="Courier New" pitchFamily="34" charset="0"/>
                 <a:ea typeface="Courier New" pitchFamily="34" charset="-122"/>
@@ -6279,7 +6299,7 @@
             <a:r>
               <a:rPr lang="en-US" sz="1400" dirty="0">
                 <a:solidFill>
-                  <a:srgbClr val="C9D3F5"/>
+                  <a:srgbClr val="1F2429"/>
                 </a:solidFill>
                 <a:latin typeface="Courier New" pitchFamily="34" charset="0"/>
                 <a:ea typeface="Courier New" pitchFamily="34" charset="-122"/>
@@ -6308,7 +6328,7 @@
             <a:r>
               <a:rPr lang="en-US" sz="1400" dirty="0">
                 <a:solidFill>
-                  <a:srgbClr val="C9D3F5"/>
+                  <a:srgbClr val="1F2429"/>
                 </a:solidFill>
                 <a:latin typeface="Courier New" pitchFamily="34" charset="0"/>
                 <a:ea typeface="Courier New" pitchFamily="34" charset="-122"/>
@@ -6328,7 +6348,7 @@
             <a:r>
               <a:rPr lang="en-US" sz="1400" dirty="0">
                 <a:solidFill>
-                  <a:srgbClr val="C9D3F5"/>
+                  <a:srgbClr val="1F2429"/>
                 </a:solidFill>
                 <a:latin typeface="Courier New" pitchFamily="34" charset="0"/>
                 <a:ea typeface="Courier New" pitchFamily="34" charset="-122"/>
@@ -6348,7 +6368,7 @@
             <a:r>
               <a:rPr lang="en-US" sz="1400" dirty="0">
                 <a:solidFill>
-                  <a:srgbClr val="C9D3F5"/>
+                  <a:srgbClr val="1F2429"/>
                 </a:solidFill>
                 <a:latin typeface="Courier New" pitchFamily="34" charset="0"/>
                 <a:ea typeface="Courier New" pitchFamily="34" charset="-122"/>
@@ -6368,7 +6388,7 @@
             <a:r>
               <a:rPr lang="en-US" sz="1400" dirty="0">
                 <a:solidFill>
-                  <a:srgbClr val="C9D3F5"/>
+                  <a:srgbClr val="1F2429"/>
                 </a:solidFill>
                 <a:latin typeface="Courier New" pitchFamily="34" charset="0"/>
                 <a:ea typeface="Courier New" pitchFamily="34" charset="-122"/>
@@ -6388,7 +6408,7 @@
             <a:r>
               <a:rPr lang="en-US" sz="1400" dirty="0">
                 <a:solidFill>
-                  <a:srgbClr val="C9D3F5"/>
+                  <a:srgbClr val="1F2429"/>
                 </a:solidFill>
                 <a:latin typeface="Courier New" pitchFamily="34" charset="0"/>
                 <a:ea typeface="Courier New" pitchFamily="34" charset="-122"/>
@@ -6408,7 +6428,7 @@
             <a:r>
               <a:rPr lang="en-US" sz="1400" dirty="0">
                 <a:solidFill>
-                  <a:srgbClr val="C9D3F5"/>
+                  <a:srgbClr val="1F2429"/>
                 </a:solidFill>
                 <a:latin typeface="Courier New" pitchFamily="34" charset="0"/>
                 <a:ea typeface="Courier New" pitchFamily="34" charset="-122"/>
@@ -7049,9 +7069,13 @@
             </a:avLst>
           </a:prstGeom>
           <a:solidFill>
-            <a:srgbClr val="1E1E4C"/>
+            <a:srgbClr val="F7F8F9"/>
           </a:solidFill>
-          <a:ln/>
+          <a:ln w="9525">
+            <a:solidFill>
+              <a:srgbClr val="D0D5DD"/>
+            </a:solidFill>
+          </a:ln>
         </p:spPr>
         <p:txBody>
           <a:bodyPr/>
@@ -7088,7 +7112,7 @@
             <a:r>
               <a:rPr lang="en-US" sz="1400" dirty="0">
                 <a:solidFill>
-                  <a:srgbClr val="C9D3F5"/>
+                  <a:srgbClr val="1F2429"/>
                 </a:solidFill>
                 <a:latin typeface="Courier New" pitchFamily="34" charset="0"/>
                 <a:ea typeface="Courier New" pitchFamily="34" charset="-122"/>
@@ -7117,7 +7141,7 @@
             <a:r>
               <a:rPr lang="en-US" sz="1400" dirty="0">
                 <a:solidFill>
-                  <a:srgbClr val="C9D3F5"/>
+                  <a:srgbClr val="1F2429"/>
                 </a:solidFill>
                 <a:latin typeface="Courier New" pitchFamily="34" charset="0"/>
                 <a:ea typeface="Courier New" pitchFamily="34" charset="-122"/>
@@ -7137,7 +7161,7 @@
             <a:r>
               <a:rPr lang="en-US" sz="1400" dirty="0">
                 <a:solidFill>
-                  <a:srgbClr val="C9D3F5"/>
+                  <a:srgbClr val="1F2429"/>
                 </a:solidFill>
                 <a:latin typeface="Courier New" pitchFamily="34" charset="0"/>
                 <a:ea typeface="Courier New" pitchFamily="34" charset="-122"/>
@@ -7166,7 +7190,7 @@
             <a:r>
               <a:rPr lang="en-US" sz="1400" dirty="0">
                 <a:solidFill>
-                  <a:srgbClr val="C9D3F5"/>
+                  <a:srgbClr val="1F2429"/>
                 </a:solidFill>
                 <a:latin typeface="Courier New" pitchFamily="34" charset="0"/>
                 <a:ea typeface="Courier New" pitchFamily="34" charset="-122"/>
@@ -7186,7 +7210,7 @@
             <a:r>
               <a:rPr lang="en-US" sz="1400" dirty="0">
                 <a:solidFill>
-                  <a:srgbClr val="C9D3F5"/>
+                  <a:srgbClr val="1F2429"/>
                 </a:solidFill>
                 <a:latin typeface="Courier New" pitchFamily="34" charset="0"/>
                 <a:ea typeface="Courier New" pitchFamily="34" charset="-122"/>
@@ -8062,7 +8086,7 @@
         <p:spPr>
           <a:xfrm>
             <a:off x="640080" y="1965960"/>
-            <a:ext cx="10911535" cy="1828800"/>
+            <a:ext cx="10911535" cy="3980000"/>
           </a:xfrm>
           <a:prstGeom prst="roundRect">
             <a:avLst>
@@ -8093,7 +8117,7 @@
         <p:spPr>
           <a:xfrm>
             <a:off x="868680" y="2103120"/>
-            <a:ext cx="10454335" cy="274320"/>
+            <a:ext cx="10454335" cy="400000"/>
           </a:xfrm>
           <a:prstGeom prst="rect">
             <a:avLst/>
@@ -8109,7 +8133,7 @@
               <a:buNone/>
             </a:pPr>
             <a:r>
-              <a:rPr lang="en-US" sz="1000" b="1" spc="200" kern="0" dirty="0">
+              <a:rPr lang="en-US" sz="1800" b="1" spc="200" kern="0" dirty="0">
                 <a:solidFill>
                   <a:srgbClr val="8A3A12"/>
                 </a:solidFill>
@@ -8119,7 +8143,7 @@
               </a:rPr>
               <a:t>WARNING</a:t>
             </a:r>
-            <a:endParaRPr lang="en-US" sz="1000" dirty="0"/>
+            <a:endParaRPr lang="en-US" sz="1800" dirty="0"/>
           </a:p>
         </p:txBody>
       </p:sp>
@@ -8131,24 +8155,24 @@
         </p:nvSpPr>
         <p:spPr>
           <a:xfrm>
-            <a:off x="868680" y="2404872"/>
-            <a:ext cx="10454335" cy="1234440"/>
-          </a:xfrm>
-          <a:prstGeom prst="rect">
-            <a:avLst/>
-          </a:prstGeom>
-          <a:noFill/>
-          <a:ln/>
-        </p:spPr>
-        <p:txBody>
-          <a:bodyPr wrap="square" lIns="0" tIns="0" rIns="0" bIns="0" rtlCol="0" anchor="t"/>
-          <a:lstStyle/>
-          <a:p>
-            <a:pPr indent="0" marL="0">
-              <a:buNone/>
-            </a:pPr>
-            <a:r>
-              <a:rPr lang="en-US" sz="1250" dirty="0">
+            <a:off x="868680" y="2795960"/>
+            <a:ext cx="10454335" cy="3000000"/>
+          </a:xfrm>
+          <a:prstGeom prst="rect">
+            <a:avLst/>
+          </a:prstGeom>
+          <a:noFill/>
+          <a:ln/>
+        </p:spPr>
+        <p:txBody>
+          <a:bodyPr wrap="square" lIns="0" tIns="0" rIns="0" bIns="0" rtlCol="0" anchor="ctr"/>
+          <a:lstStyle/>
+          <a:p>
+            <a:pPr indent="0" marL="0">
+              <a:buNone/>
+            </a:pPr>
+            <a:r>
+              <a:rPr lang="en-US" sz="2800" dirty="0">
                 <a:solidFill>
                   <a:srgbClr val="26262F"/>
                 </a:solidFill>
@@ -8158,7 +8182,7 @@
               </a:rPr>
               <a:t>Only use the unescaped &lt;%- %&gt; tag for content you trust completely — your own partials, or HTML you've deliberately sanitized. Default to escaped output (&lt;%= %&gt;) and treat unescaped output as an exception that needs a specific reason.</a:t>
             </a:r>
-            <a:endParaRPr lang="en-US" sz="1250" dirty="0"/>
+            <a:endParaRPr lang="en-US" sz="2800" dirty="0"/>
           </a:p>
         </p:txBody>
       </p:sp>
@@ -8332,9 +8356,13 @@
             </a:avLst>
           </a:prstGeom>
           <a:solidFill>
-            <a:srgbClr val="1E1E4C"/>
+            <a:srgbClr val="F7F8F9"/>
           </a:solidFill>
-          <a:ln/>
+          <a:ln w="9525">
+            <a:solidFill>
+              <a:srgbClr val="D0D5DD"/>
+            </a:solidFill>
+          </a:ln>
         </p:spPr>
         <p:txBody>
           <a:bodyPr/>
@@ -8371,7 +8399,7 @@
             <a:r>
               <a:rPr lang="en-US" sz="1200" dirty="0">
                 <a:solidFill>
-                  <a:srgbClr val="C9D3F5"/>
+                  <a:srgbClr val="1F2429"/>
                 </a:solidFill>
                 <a:latin typeface="Courier New" pitchFamily="34" charset="0"/>
                 <a:ea typeface="Courier New" pitchFamily="34" charset="-122"/>
@@ -8391,7 +8419,7 @@
             <a:r>
               <a:rPr lang="en-US" sz="1200" dirty="0">
                 <a:solidFill>
-                  <a:srgbClr val="C9D3F5"/>
+                  <a:srgbClr val="1F2429"/>
                 </a:solidFill>
                 <a:latin typeface="Courier New" pitchFamily="34" charset="0"/>
                 <a:ea typeface="Courier New" pitchFamily="34" charset="-122"/>
@@ -8420,7 +8448,7 @@
             <a:r>
               <a:rPr lang="en-US" sz="1200" dirty="0">
                 <a:solidFill>
-                  <a:srgbClr val="C9D3F5"/>
+                  <a:srgbClr val="1F2429"/>
                 </a:solidFill>
                 <a:latin typeface="Courier New" pitchFamily="34" charset="0"/>
                 <a:ea typeface="Courier New" pitchFamily="34" charset="-122"/>
@@ -8440,7 +8468,7 @@
             <a:r>
               <a:rPr lang="en-US" sz="1200" dirty="0">
                 <a:solidFill>
-                  <a:srgbClr val="C9D3F5"/>
+                  <a:srgbClr val="1F2429"/>
                 </a:solidFill>
                 <a:latin typeface="Courier New" pitchFamily="34" charset="0"/>
                 <a:ea typeface="Courier New" pitchFamily="34" charset="-122"/>
@@ -8460,7 +8488,7 @@
             <a:r>
               <a:rPr lang="en-US" sz="1200" dirty="0">
                 <a:solidFill>
-                  <a:srgbClr val="C9D3F5"/>
+                  <a:srgbClr val="1F2429"/>
                 </a:solidFill>
                 <a:latin typeface="Courier New" pitchFamily="34" charset="0"/>
                 <a:ea typeface="Courier New" pitchFamily="34" charset="-122"/>
@@ -8480,7 +8508,7 @@
             <a:r>
               <a:rPr lang="en-US" sz="1200" dirty="0">
                 <a:solidFill>
-                  <a:srgbClr val="C9D3F5"/>
+                  <a:srgbClr val="1F2429"/>
                 </a:solidFill>
                 <a:latin typeface="Courier New" pitchFamily="34" charset="0"/>
                 <a:ea typeface="Courier New" pitchFamily="34" charset="-122"/>
@@ -8500,7 +8528,7 @@
             <a:r>
               <a:rPr lang="en-US" sz="1200" dirty="0">
                 <a:solidFill>
-                  <a:srgbClr val="C9D3F5"/>
+                  <a:srgbClr val="1F2429"/>
                 </a:solidFill>
                 <a:latin typeface="Courier New" pitchFamily="34" charset="0"/>
                 <a:ea typeface="Courier New" pitchFamily="34" charset="-122"/>
@@ -8520,7 +8548,7 @@
             <a:r>
               <a:rPr lang="en-US" sz="1200" dirty="0">
                 <a:solidFill>
-                  <a:srgbClr val="C9D3F5"/>
+                  <a:srgbClr val="1F2429"/>
                 </a:solidFill>
                 <a:latin typeface="Courier New" pitchFamily="34" charset="0"/>
                 <a:ea typeface="Courier New" pitchFamily="34" charset="-122"/>
@@ -8540,7 +8568,7 @@
             <a:r>
               <a:rPr lang="en-US" sz="1200" dirty="0">
                 <a:solidFill>
-                  <a:srgbClr val="C9D3F5"/>
+                  <a:srgbClr val="1F2429"/>
                 </a:solidFill>
                 <a:latin typeface="Courier New" pitchFamily="34" charset="0"/>
                 <a:ea typeface="Courier New" pitchFamily="34" charset="-122"/>
@@ -8560,7 +8588,7 @@
             <a:r>
               <a:rPr lang="en-US" sz="1200" dirty="0">
                 <a:solidFill>
-                  <a:srgbClr val="C9D3F5"/>
+                  <a:srgbClr val="1F2429"/>
                 </a:solidFill>
                 <a:latin typeface="Courier New" pitchFamily="34" charset="0"/>
                 <a:ea typeface="Courier New" pitchFamily="34" charset="-122"/>
@@ -8580,7 +8608,7 @@
             <a:r>
               <a:rPr lang="en-US" sz="1200" dirty="0">
                 <a:solidFill>
-                  <a:srgbClr val="C9D3F5"/>
+                  <a:srgbClr val="1F2429"/>
                 </a:solidFill>
                 <a:latin typeface="Courier New" pitchFamily="34" charset="0"/>
                 <a:ea typeface="Courier New" pitchFamily="34" charset="-122"/>
@@ -8801,9 +8829,13 @@
             </a:avLst>
           </a:prstGeom>
           <a:solidFill>
-            <a:srgbClr val="1E1E4C"/>
+            <a:srgbClr val="F7F8F9"/>
           </a:solidFill>
-          <a:ln/>
+          <a:ln w="9525">
+            <a:solidFill>
+              <a:srgbClr val="D0D5DD"/>
+            </a:solidFill>
+          </a:ln>
         </p:spPr>
         <p:txBody>
           <a:bodyPr/>
@@ -8840,7 +8872,7 @@
             <a:r>
               <a:rPr lang="en-US" sz="1300" dirty="0">
                 <a:solidFill>
-                  <a:srgbClr val="C9D3F5"/>
+                  <a:srgbClr val="1F2429"/>
                 </a:solidFill>
                 <a:latin typeface="Courier New" pitchFamily="34" charset="0"/>
                 <a:ea typeface="Courier New" pitchFamily="34" charset="-122"/>
@@ -8860,7 +8892,7 @@
             <a:r>
               <a:rPr lang="en-US" sz="1300" dirty="0">
                 <a:solidFill>
-                  <a:srgbClr val="C9D3F5"/>
+                  <a:srgbClr val="1F2429"/>
                 </a:solidFill>
                 <a:latin typeface="Courier New" pitchFamily="34" charset="0"/>
                 <a:ea typeface="Courier New" pitchFamily="34" charset="-122"/>
@@ -8880,7 +8912,7 @@
             <a:r>
               <a:rPr lang="en-US" sz="1300" dirty="0">
                 <a:solidFill>
-                  <a:srgbClr val="C9D3F5"/>
+                  <a:srgbClr val="1F2429"/>
                 </a:solidFill>
                 <a:latin typeface="Courier New" pitchFamily="34" charset="0"/>
                 <a:ea typeface="Courier New" pitchFamily="34" charset="-122"/>
@@ -8900,7 +8932,7 @@
             <a:r>
               <a:rPr lang="en-US" sz="1300" dirty="0">
                 <a:solidFill>
-                  <a:srgbClr val="C9D3F5"/>
+                  <a:srgbClr val="1F2429"/>
                 </a:solidFill>
                 <a:latin typeface="Courier New" pitchFamily="34" charset="0"/>
                 <a:ea typeface="Courier New" pitchFamily="34" charset="-122"/>
@@ -8920,7 +8952,7 @@
             <a:r>
               <a:rPr lang="en-US" sz="1300" dirty="0">
                 <a:solidFill>
-                  <a:srgbClr val="C9D3F5"/>
+                  <a:srgbClr val="1F2429"/>
                 </a:solidFill>
                 <a:latin typeface="Courier New" pitchFamily="34" charset="0"/>
                 <a:ea typeface="Courier New" pitchFamily="34" charset="-122"/>
@@ -8940,7 +8972,7 @@
             <a:r>
               <a:rPr lang="en-US" sz="1300" dirty="0">
                 <a:solidFill>
-                  <a:srgbClr val="C9D3F5"/>
+                  <a:srgbClr val="1F2429"/>
                 </a:solidFill>
                 <a:latin typeface="Courier New" pitchFamily="34" charset="0"/>
                 <a:ea typeface="Courier New" pitchFamily="34" charset="-122"/>
@@ -8969,7 +9001,7 @@
             <a:r>
               <a:rPr lang="en-US" sz="1300" dirty="0">
                 <a:solidFill>
-                  <a:srgbClr val="C9D3F5"/>
+                  <a:srgbClr val="1F2429"/>
                 </a:solidFill>
                 <a:latin typeface="Courier New" pitchFamily="34" charset="0"/>
                 <a:ea typeface="Courier New" pitchFamily="34" charset="-122"/>
@@ -8989,7 +9021,7 @@
             <a:r>
               <a:rPr lang="en-US" sz="1300" dirty="0">
                 <a:solidFill>
-                  <a:srgbClr val="C9D3F5"/>
+                  <a:srgbClr val="1F2429"/>
                 </a:solidFill>
                 <a:latin typeface="Courier New" pitchFamily="34" charset="0"/>
                 <a:ea typeface="Courier New" pitchFamily="34" charset="-122"/>
@@ -9009,7 +9041,7 @@
             <a:r>
               <a:rPr lang="en-US" sz="1300" dirty="0">
                 <a:solidFill>
-                  <a:srgbClr val="C9D3F5"/>
+                  <a:srgbClr val="1F2429"/>
                 </a:solidFill>
                 <a:latin typeface="Courier New" pitchFamily="34" charset="0"/>
                 <a:ea typeface="Courier New" pitchFamily="34" charset="-122"/>
@@ -9029,7 +9061,7 @@
             <a:r>
               <a:rPr lang="en-US" sz="1300" dirty="0">
                 <a:solidFill>
-                  <a:srgbClr val="C9D3F5"/>
+                  <a:srgbClr val="1F2429"/>
                 </a:solidFill>
                 <a:latin typeface="Courier New" pitchFamily="34" charset="0"/>
                 <a:ea typeface="Courier New" pitchFamily="34" charset="-122"/>
@@ -9732,9 +9764,13 @@
             </a:avLst>
           </a:prstGeom>
           <a:solidFill>
-            <a:srgbClr val="1E1E4C"/>
+            <a:srgbClr val="F7F8F9"/>
           </a:solidFill>
-          <a:ln/>
+          <a:ln w="9525">
+            <a:solidFill>
+              <a:srgbClr val="D0D5DD"/>
+            </a:solidFill>
+          </a:ln>
         </p:spPr>
         <p:txBody>
           <a:bodyPr/>
@@ -9771,7 +9807,7 @@
             <a:r>
               <a:rPr lang="en-US" sz="1400" dirty="0">
                 <a:solidFill>
-                  <a:srgbClr val="C9D3F5"/>
+                  <a:srgbClr val="1F2429"/>
                 </a:solidFill>
                 <a:latin typeface="Courier New" pitchFamily="34" charset="0"/>
                 <a:ea typeface="Courier New" pitchFamily="34" charset="-122"/>
@@ -9800,7 +9836,7 @@
             <a:r>
               <a:rPr lang="en-US" sz="1400" dirty="0">
                 <a:solidFill>
-                  <a:srgbClr val="C9D3F5"/>
+                  <a:srgbClr val="1F2429"/>
                 </a:solidFill>
                 <a:latin typeface="Courier New" pitchFamily="34" charset="0"/>
                 <a:ea typeface="Courier New" pitchFamily="34" charset="-122"/>
@@ -9820,7 +9856,7 @@
             <a:r>
               <a:rPr lang="en-US" sz="1400" dirty="0">
                 <a:solidFill>
-                  <a:srgbClr val="C9D3F5"/>
+                  <a:srgbClr val="1F2429"/>
                 </a:solidFill>
                 <a:latin typeface="Courier New" pitchFamily="34" charset="0"/>
                 <a:ea typeface="Courier New" pitchFamily="34" charset="-122"/>
@@ -9849,7 +9885,7 @@
             <a:r>
               <a:rPr lang="en-US" sz="1400" dirty="0">
                 <a:solidFill>
-                  <a:srgbClr val="C9D3F5"/>
+                  <a:srgbClr val="1F2429"/>
                 </a:solidFill>
                 <a:latin typeface="Courier New" pitchFamily="34" charset="0"/>
                 <a:ea typeface="Courier New" pitchFamily="34" charset="-122"/>
@@ -9869,7 +9905,7 @@
             <a:r>
               <a:rPr lang="en-US" sz="1400" dirty="0">
                 <a:solidFill>
-                  <a:srgbClr val="C9D3F5"/>
+                  <a:srgbClr val="1F2429"/>
                 </a:solidFill>
                 <a:latin typeface="Courier New" pitchFamily="34" charset="0"/>
                 <a:ea typeface="Courier New" pitchFamily="34" charset="-122"/>
@@ -9889,7 +9925,7 @@
             <a:r>
               <a:rPr lang="en-US" sz="1400" dirty="0">
                 <a:solidFill>
-                  <a:srgbClr val="C9D3F5"/>
+                  <a:srgbClr val="1F2429"/>
                 </a:solidFill>
                 <a:latin typeface="Courier New" pitchFamily="34" charset="0"/>
                 <a:ea typeface="Courier New" pitchFamily="34" charset="-122"/>
@@ -9909,7 +9945,7 @@
             <a:r>
               <a:rPr lang="en-US" sz="1400" dirty="0">
                 <a:solidFill>
-                  <a:srgbClr val="C9D3F5"/>
+                  <a:srgbClr val="1F2429"/>
                 </a:solidFill>
                 <a:latin typeface="Courier New" pitchFamily="34" charset="0"/>
                 <a:ea typeface="Courier New" pitchFamily="34" charset="-122"/>
@@ -9929,7 +9965,7 @@
             <a:r>
               <a:rPr lang="en-US" sz="1400" dirty="0">
                 <a:solidFill>
-                  <a:srgbClr val="C9D3F5"/>
+                  <a:srgbClr val="1F2429"/>
                 </a:solidFill>
                 <a:latin typeface="Courier New" pitchFamily="34" charset="0"/>
                 <a:ea typeface="Courier New" pitchFamily="34" charset="-122"/>
@@ -9949,7 +9985,7 @@
             <a:r>
               <a:rPr lang="en-US" sz="1400" dirty="0">
                 <a:solidFill>
-                  <a:srgbClr val="C9D3F5"/>
+                  <a:srgbClr val="1F2429"/>
                 </a:solidFill>
                 <a:latin typeface="Courier New" pitchFamily="34" charset="0"/>
                 <a:ea typeface="Courier New" pitchFamily="34" charset="-122"/>
@@ -10131,9 +10167,13 @@
             </a:avLst>
           </a:prstGeom>
           <a:solidFill>
-            <a:srgbClr val="1E1E4C"/>
+            <a:srgbClr val="F7F8F9"/>
           </a:solidFill>
-          <a:ln/>
+          <a:ln w="9525">
+            <a:solidFill>
+              <a:srgbClr val="D0D5DD"/>
+            </a:solidFill>
+          </a:ln>
         </p:spPr>
         <p:txBody>
           <a:bodyPr/>
@@ -10170,7 +10210,7 @@
             <a:r>
               <a:rPr lang="en-US" sz="1400" dirty="0">
                 <a:solidFill>
-                  <a:srgbClr val="C9D3F5"/>
+                  <a:srgbClr val="1F2429"/>
                 </a:solidFill>
                 <a:latin typeface="Courier New" pitchFamily="34" charset="0"/>
                 <a:ea typeface="Courier New" pitchFamily="34" charset="-122"/>
@@ -10190,7 +10230,7 @@
             <a:r>
               <a:rPr lang="en-US" sz="1400" dirty="0">
                 <a:solidFill>
-                  <a:srgbClr val="C9D3F5"/>
+                  <a:srgbClr val="1F2429"/>
                 </a:solidFill>
                 <a:latin typeface="Courier New" pitchFamily="34" charset="0"/>
                 <a:ea typeface="Courier New" pitchFamily="34" charset="-122"/>
@@ -10210,7 +10250,7 @@
             <a:r>
               <a:rPr lang="en-US" sz="1400" dirty="0">
                 <a:solidFill>
-                  <a:srgbClr val="C9D3F5"/>
+                  <a:srgbClr val="1F2429"/>
                 </a:solidFill>
                 <a:latin typeface="Courier New" pitchFamily="34" charset="0"/>
                 <a:ea typeface="Courier New" pitchFamily="34" charset="-122"/>
@@ -10230,7 +10270,7 @@
             <a:r>
               <a:rPr lang="en-US" sz="1400" dirty="0">
                 <a:solidFill>
-                  <a:srgbClr val="C9D3F5"/>
+                  <a:srgbClr val="1F2429"/>
                 </a:solidFill>
                 <a:latin typeface="Courier New" pitchFamily="34" charset="0"/>
                 <a:ea typeface="Courier New" pitchFamily="34" charset="-122"/>
@@ -10250,7 +10290,7 @@
             <a:r>
               <a:rPr lang="en-US" sz="1400" dirty="0">
                 <a:solidFill>
-                  <a:srgbClr val="C9D3F5"/>
+                  <a:srgbClr val="1F2429"/>
                 </a:solidFill>
                 <a:latin typeface="Courier New" pitchFamily="34" charset="0"/>
                 <a:ea typeface="Courier New" pitchFamily="34" charset="-122"/>
@@ -10279,7 +10319,7 @@
             <a:r>
               <a:rPr lang="en-US" sz="1400" dirty="0">
                 <a:solidFill>
-                  <a:srgbClr val="C9D3F5"/>
+                  <a:srgbClr val="1F2429"/>
                 </a:solidFill>
                 <a:latin typeface="Courier New" pitchFamily="34" charset="0"/>
                 <a:ea typeface="Courier New" pitchFamily="34" charset="-122"/>
@@ -10299,7 +10339,7 @@
             <a:r>
               <a:rPr lang="en-US" sz="1400" dirty="0">
                 <a:solidFill>
-                  <a:srgbClr val="C9D3F5"/>
+                  <a:srgbClr val="1F2429"/>
                 </a:solidFill>
                 <a:latin typeface="Courier New" pitchFamily="34" charset="0"/>
                 <a:ea typeface="Courier New" pitchFamily="34" charset="-122"/>
@@ -10319,7 +10359,7 @@
             <a:r>
               <a:rPr lang="en-US" sz="1400" dirty="0">
                 <a:solidFill>
-                  <a:srgbClr val="C9D3F5"/>
+                  <a:srgbClr val="1F2429"/>
                 </a:solidFill>
                 <a:latin typeface="Courier New" pitchFamily="34" charset="0"/>
                 <a:ea typeface="Courier New" pitchFamily="34" charset="-122"/>
@@ -10339,7 +10379,7 @@
             <a:r>
               <a:rPr lang="en-US" sz="1400" dirty="0">
                 <a:solidFill>
-                  <a:srgbClr val="C9D3F5"/>
+                  <a:srgbClr val="1F2429"/>
                 </a:solidFill>
                 <a:latin typeface="Courier New" pitchFamily="34" charset="0"/>
                 <a:ea typeface="Courier New" pitchFamily="34" charset="-122"/>
@@ -13428,9 +13468,13 @@
             </a:avLst>
           </a:prstGeom>
           <a:solidFill>
-            <a:srgbClr val="1E1E4C"/>
+            <a:srgbClr val="F7F8F9"/>
           </a:solidFill>
-          <a:ln/>
+          <a:ln w="9525">
+            <a:solidFill>
+              <a:srgbClr val="D0D5DD"/>
+            </a:solidFill>
+          </a:ln>
         </p:spPr>
         <p:txBody>
           <a:bodyPr/>
@@ -13467,7 +13511,7 @@
             <a:r>
               <a:rPr lang="en-US" sz="1400" dirty="0">
                 <a:solidFill>
-                  <a:srgbClr val="C9D3F5"/>
+                  <a:srgbClr val="1F2429"/>
                 </a:solidFill>
                 <a:latin typeface="Courier New" pitchFamily="34" charset="0"/>
                 <a:ea typeface="Courier New" pitchFamily="34" charset="-122"/>
@@ -13496,7 +13540,7 @@
             <a:r>
               <a:rPr lang="en-US" sz="1400" dirty="0">
                 <a:solidFill>
-                  <a:srgbClr val="C9D3F5"/>
+                  <a:srgbClr val="1F2429"/>
                 </a:solidFill>
                 <a:latin typeface="Courier New" pitchFamily="34" charset="0"/>
                 <a:ea typeface="Courier New" pitchFamily="34" charset="-122"/>
@@ -13516,7 +13560,7 @@
             <a:r>
               <a:rPr lang="en-US" sz="1400" dirty="0">
                 <a:solidFill>
-                  <a:srgbClr val="C9D3F5"/>
+                  <a:srgbClr val="1F2429"/>
                 </a:solidFill>
                 <a:latin typeface="Courier New" pitchFamily="34" charset="0"/>
                 <a:ea typeface="Courier New" pitchFamily="34" charset="-122"/>
@@ -13545,7 +13589,7 @@
             <a:r>
               <a:rPr lang="en-US" sz="1400" dirty="0">
                 <a:solidFill>
-                  <a:srgbClr val="C9D3F5"/>
+                  <a:srgbClr val="1F2429"/>
                 </a:solidFill>
                 <a:latin typeface="Courier New" pitchFamily="34" charset="0"/>
                 <a:ea typeface="Courier New" pitchFamily="34" charset="-122"/>
@@ -13565,7 +13609,7 @@
             <a:r>
               <a:rPr lang="en-US" sz="1400" dirty="0">
                 <a:solidFill>
-                  <a:srgbClr val="C9D3F5"/>
+                  <a:srgbClr val="1F2429"/>
                 </a:solidFill>
                 <a:latin typeface="Courier New" pitchFamily="34" charset="0"/>
                 <a:ea typeface="Courier New" pitchFamily="34" charset="-122"/>
@@ -13786,9 +13830,13 @@
             </a:avLst>
           </a:prstGeom>
           <a:solidFill>
-            <a:srgbClr val="1E1E4C"/>
+            <a:srgbClr val="F7F8F9"/>
           </a:solidFill>
-          <a:ln/>
+          <a:ln w="9525">
+            <a:solidFill>
+              <a:srgbClr val="D0D5DD"/>
+            </a:solidFill>
+          </a:ln>
         </p:spPr>
         <p:txBody>
           <a:bodyPr/>
@@ -13825,7 +13873,7 @@
             <a:r>
               <a:rPr lang="en-US" sz="1400" dirty="0">
                 <a:solidFill>
-                  <a:srgbClr val="C9D3F5"/>
+                  <a:srgbClr val="1F2429"/>
                 </a:solidFill>
                 <a:latin typeface="Courier New" pitchFamily="34" charset="0"/>
                 <a:ea typeface="Courier New" pitchFamily="34" charset="-122"/>
@@ -13845,7 +13893,7 @@
             <a:r>
               <a:rPr lang="en-US" sz="1400" dirty="0">
                 <a:solidFill>
-                  <a:srgbClr val="C9D3F5"/>
+                  <a:srgbClr val="1F2429"/>
                 </a:solidFill>
                 <a:latin typeface="Courier New" pitchFamily="34" charset="0"/>
                 <a:ea typeface="Courier New" pitchFamily="34" charset="-122"/>
@@ -13865,7 +13913,7 @@
             <a:r>
               <a:rPr lang="en-US" sz="1400" dirty="0">
                 <a:solidFill>
-                  <a:srgbClr val="C9D3F5"/>
+                  <a:srgbClr val="1F2429"/>
                 </a:solidFill>
                 <a:latin typeface="Courier New" pitchFamily="34" charset="0"/>
                 <a:ea typeface="Courier New" pitchFamily="34" charset="-122"/>
@@ -13885,7 +13933,7 @@
             <a:r>
               <a:rPr lang="en-US" sz="1400" dirty="0">
                 <a:solidFill>
-                  <a:srgbClr val="C9D3F5"/>
+                  <a:srgbClr val="1F2429"/>
                 </a:solidFill>
                 <a:latin typeface="Courier New" pitchFamily="34" charset="0"/>
                 <a:ea typeface="Courier New" pitchFamily="34" charset="-122"/>
@@ -13905,7 +13953,7 @@
             <a:r>
               <a:rPr lang="en-US" sz="1400" dirty="0">
                 <a:solidFill>
-                  <a:srgbClr val="C9D3F5"/>
+                  <a:srgbClr val="1F2429"/>
                 </a:solidFill>
                 <a:latin typeface="Courier New" pitchFamily="34" charset="0"/>
                 <a:ea typeface="Courier New" pitchFamily="34" charset="-122"/>
@@ -13925,7 +13973,7 @@
             <a:r>
               <a:rPr lang="en-US" sz="1400" dirty="0">
                 <a:solidFill>
-                  <a:srgbClr val="C9D3F5"/>
+                  <a:srgbClr val="1F2429"/>
                 </a:solidFill>
                 <a:latin typeface="Courier New" pitchFamily="34" charset="0"/>
                 <a:ea typeface="Courier New" pitchFamily="34" charset="-122"/>
@@ -14107,9 +14155,13 @@
             </a:avLst>
           </a:prstGeom>
           <a:solidFill>
-            <a:srgbClr val="1E1E4C"/>
+            <a:srgbClr val="F7F8F9"/>
           </a:solidFill>
-          <a:ln/>
+          <a:ln w="9525">
+            <a:solidFill>
+              <a:srgbClr val="D0D5DD"/>
+            </a:solidFill>
+          </a:ln>
         </p:spPr>
         <p:txBody>
           <a:bodyPr/>
@@ -14146,7 +14198,7 @@
             <a:r>
               <a:rPr lang="en-US" sz="1300" dirty="0">
                 <a:solidFill>
-                  <a:srgbClr val="C9D3F5"/>
+                  <a:srgbClr val="1F2429"/>
                 </a:solidFill>
                 <a:latin typeface="Courier New" pitchFamily="34" charset="0"/>
                 <a:ea typeface="Courier New" pitchFamily="34" charset="-122"/>
@@ -14166,7 +14218,7 @@
             <a:r>
               <a:rPr lang="en-US" sz="1300" dirty="0">
                 <a:solidFill>
-                  <a:srgbClr val="C9D3F5"/>
+                  <a:srgbClr val="1F2429"/>
                 </a:solidFill>
                 <a:latin typeface="Courier New" pitchFamily="34" charset="0"/>
                 <a:ea typeface="Courier New" pitchFamily="34" charset="-122"/>
@@ -14186,7 +14238,7 @@
             <a:r>
               <a:rPr lang="en-US" sz="1300" dirty="0">
                 <a:solidFill>
-                  <a:srgbClr val="C9D3F5"/>
+                  <a:srgbClr val="1F2429"/>
                 </a:solidFill>
                 <a:latin typeface="Courier New" pitchFamily="34" charset="0"/>
                 <a:ea typeface="Courier New" pitchFamily="34" charset="-122"/>
@@ -14206,7 +14258,7 @@
             <a:r>
               <a:rPr lang="en-US" sz="1300" dirty="0">
                 <a:solidFill>
-                  <a:srgbClr val="C9D3F5"/>
+                  <a:srgbClr val="1F2429"/>
                 </a:solidFill>
                 <a:latin typeface="Courier New" pitchFamily="34" charset="0"/>
                 <a:ea typeface="Courier New" pitchFamily="34" charset="-122"/>
@@ -14226,7 +14278,7 @@
             <a:r>
               <a:rPr lang="en-US" sz="1300" dirty="0">
                 <a:solidFill>
-                  <a:srgbClr val="C9D3F5"/>
+                  <a:srgbClr val="1F2429"/>
                 </a:solidFill>
                 <a:latin typeface="Courier New" pitchFamily="34" charset="0"/>
                 <a:ea typeface="Courier New" pitchFamily="34" charset="-122"/>
@@ -14246,7 +14298,7 @@
             <a:r>
               <a:rPr lang="en-US" sz="1300" dirty="0">
                 <a:solidFill>
-                  <a:srgbClr val="C9D3F5"/>
+                  <a:srgbClr val="1F2429"/>
                 </a:solidFill>
                 <a:latin typeface="Courier New" pitchFamily="34" charset="0"/>
                 <a:ea typeface="Courier New" pitchFamily="34" charset="-122"/>
@@ -14266,7 +14318,7 @@
             <a:r>
               <a:rPr lang="en-US" sz="1300" dirty="0">
                 <a:solidFill>
-                  <a:srgbClr val="C9D3F5"/>
+                  <a:srgbClr val="1F2429"/>
                 </a:solidFill>
                 <a:latin typeface="Courier New" pitchFamily="34" charset="0"/>
                 <a:ea typeface="Courier New" pitchFamily="34" charset="-122"/>
@@ -14286,7 +14338,7 @@
             <a:r>
               <a:rPr lang="en-US" sz="1300" dirty="0">
                 <a:solidFill>
-                  <a:srgbClr val="C9D3F5"/>
+                  <a:srgbClr val="1F2429"/>
                 </a:solidFill>
                 <a:latin typeface="Courier New" pitchFamily="34" charset="0"/>
                 <a:ea typeface="Courier New" pitchFamily="34" charset="-122"/>
@@ -14522,7 +14574,7 @@
         <p:spPr>
           <a:xfrm>
             <a:off x="640080" y="1965960"/>
-            <a:ext cx="10911535" cy="1554480"/>
+            <a:ext cx="10911535" cy="3657600"/>
           </a:xfrm>
           <a:prstGeom prst="roundRect">
             <a:avLst>
@@ -14553,7 +14605,7 @@
         <p:spPr>
           <a:xfrm>
             <a:off x="868680" y="2103120"/>
-            <a:ext cx="10454335" cy="274320"/>
+            <a:ext cx="10454335" cy="400000"/>
           </a:xfrm>
           <a:prstGeom prst="rect">
             <a:avLst/>
@@ -14569,7 +14621,7 @@
               <a:buNone/>
             </a:pPr>
             <a:r>
-              <a:rPr lang="en-US" sz="1000" b="1" spc="200" kern="0" dirty="0">
+              <a:rPr lang="en-US" sz="1800" b="1" spc="200" kern="0" dirty="0">
                 <a:solidFill>
                   <a:srgbClr val="33459E"/>
                 </a:solidFill>
@@ -14579,7 +14631,7 @@
               </a:rPr>
               <a:t>NOTE</a:t>
             </a:r>
-            <a:endParaRPr lang="en-US" sz="1000" dirty="0"/>
+            <a:endParaRPr lang="en-US" sz="1800" dirty="0"/>
           </a:p>
         </p:txBody>
       </p:sp>
@@ -14591,24 +14643,24 @@
         </p:nvSpPr>
         <p:spPr>
           <a:xfrm>
-            <a:off x="868680" y="2404872"/>
-            <a:ext cx="10454335" cy="960120"/>
-          </a:xfrm>
-          <a:prstGeom prst="rect">
-            <a:avLst/>
-          </a:prstGeom>
-          <a:noFill/>
-          <a:ln/>
-        </p:spPr>
-        <p:txBody>
-          <a:bodyPr wrap="square" lIns="0" tIns="0" rIns="0" bIns="0" rtlCol="0" anchor="t"/>
-          <a:lstStyle/>
-          <a:p>
-            <a:pPr indent="0" marL="0">
-              <a:buNone/>
-            </a:pPr>
-            <a:r>
-              <a:rPr lang="en-US" sz="1250" dirty="0">
+            <a:off x="868680" y="2795960"/>
+            <a:ext cx="10454335" cy="2500000"/>
+          </a:xfrm>
+          <a:prstGeom prst="rect">
+            <a:avLst/>
+          </a:prstGeom>
+          <a:noFill/>
+          <a:ln/>
+        </p:spPr>
+        <p:txBody>
+          <a:bodyPr wrap="square" lIns="0" tIns="0" rIns="0" bIns="0" rtlCol="0" anchor="ctr"/>
+          <a:lstStyle/>
+          <a:p>
+            <a:pPr indent="0" marL="0">
+              <a:buNone/>
+            </a:pPr>
+            <a:r>
+              <a:rPr lang="en-US" sz="2800" dirty="0">
                 <a:solidFill>
                   <a:srgbClr val="26262F"/>
                 </a:solidFill>
@@ -14618,7 +14670,7 @@
               </a:rPr>
               <a:t>&lt;%= expression %&gt; is interpolation — it evaluates the JavaScript expression and inserts the result into the HTML, automatically escaping it (why that matters comes up shortly).</a:t>
             </a:r>
-            <a:endParaRPr lang="en-US" sz="1250" dirty="0"/>
+            <a:endParaRPr lang="en-US" sz="2800" dirty="0"/>
           </a:p>
         </p:txBody>
       </p:sp>
